--- a/content/W04/D1/slides/C2_W04_D01_half2_STUDENT.pptx
+++ b/content/W04/D1/slides/C2_W04_D01_half2_STUDENT.pptx
@@ -9459,7 +9459,7 @@
       </p:sp>
       <p:pic>
         <p:nvPicPr>
-          <p:cNvPr id="9" name="mermaid diagram" descr="336cc1418c5fd933.png"/>
+          <p:cNvPr id="9" name="mermaid diagram" descr="2ca6c1f7c81542e8.png"/>
           <p:cNvPicPr>
             <a:picLocks noChangeAspect="1"/>
           </p:cNvPicPr>
@@ -9473,8 +9473,8 @@
         </p:blipFill>
         <p:spPr>
           <a:xfrm>
-            <a:off x="530352" y="1956816"/>
-            <a:ext cx="11130991" cy="701632"/>
+            <a:off x="2016766" y="1682496"/>
+            <a:ext cx="8158162" cy="614362"/>
           </a:xfrm>
           <a:prstGeom prst="rect">
             <a:avLst/>
@@ -9490,8 +9490,8 @@
           <p:nvPr/>
         </p:nvGraphicFramePr>
         <p:xfrm>
-          <a:off x="530352" y="2804752"/>
-          <a:ext cx="11130989" cy="2090928"/>
+          <a:off x="530352" y="2443162"/>
+          <a:ext cx="11130990" cy="2298192"/>
         </p:xfrm>
         <a:graphic>
           <a:graphicData uri="http://schemas.openxmlformats.org/drawingml/2006/table">
@@ -9500,9 +9500,9 @@
                 <a:tableStyleId>{2D5ABB26-0587-4C30-8999-92F81FD0307C}</a:tableStyleId>
               </a:tblPr>
               <a:tblGrid>
-                <a:gridCol w="2132577"/>
-                <a:gridCol w="2670595"/>
-                <a:gridCol w="6327817"/>
+                <a:gridCol w="2298303"/>
+                <a:gridCol w="2887987"/>
+                <a:gridCol w="5944700"/>
               </a:tblGrid>
               <a:tr h="335280">
                 <a:tc>
@@ -9776,7 +9776,7 @@
                   </a:tcPr>
                 </a:tc>
               </a:tr>
-              <a:tr h="335280">
+              <a:tr h="542544">
                 <a:tc>
                   <a:txBody>
                     <a:bodyPr/>
@@ -9833,7 +9833,7 @@
                           </a:solidFill>
                           <a:latin typeface="Calibri"/>
                         </a:rPr>
-                        <a:t>Pay per completed peak trip; gamed cost Rs 1.16 crore; redesign Rs 74 lakh</a:t>
+                        <a:t>Pay per completed peak trip; the gamed top-up cost Rs 1.16 crore; Rs 74 lakh if every driver behaved the same, which the test checks</a:t>
                       </a:r>
                     </a:p>
                   </a:txBody>
@@ -9856,8 +9856,8 @@
         </p:nvSpPr>
         <p:spPr>
           <a:xfrm>
-            <a:off x="530352" y="5151712"/>
-            <a:ext cx="11130991" cy="736600"/>
+            <a:off x="530352" y="4997386"/>
+            <a:ext cx="11130991" cy="1074420"/>
           </a:xfrm>
           <a:prstGeom prst="roundRect">
             <a:avLst>
@@ -9904,8 +9904,8 @@
         </p:nvSpPr>
         <p:spPr>
           <a:xfrm>
-            <a:off x="676656" y="5279728"/>
-            <a:ext cx="45720" cy="480568"/>
+            <a:off x="676656" y="5125402"/>
+            <a:ext cx="45720" cy="818388"/>
           </a:xfrm>
           <a:prstGeom prst="roundRect">
             <a:avLst>
@@ -9950,8 +9950,8 @@
         </p:nvSpPr>
         <p:spPr>
           <a:xfrm>
-            <a:off x="877824" y="5270584"/>
-            <a:ext cx="10564063" cy="553720"/>
+            <a:off x="877824" y="5116258"/>
+            <a:ext cx="10564063" cy="891540"/>
           </a:xfrm>
           <a:prstGeom prst="rect">
             <a:avLst/>
@@ -9965,7 +9965,7 @@
           <a:lstStyle/>
           <a:p>
             <a:r>
-              <a:rPr sz="1300" b="1">
+              <a:rPr sz="1500" b="1">
                 <a:solidFill>
                   <a:srgbClr val="5B3FD6"/>
                 </a:solidFill>
@@ -9974,7 +9974,7 @@
               <a:t>Three follow-ups. </a:t>
             </a:r>
             <a:r>
-              <a:rPr sz="1300" b="0" i="0">
+              <a:rPr sz="1500" b="0" i="0">
                 <a:solidFill>
                   <a:srgbClr val="1A1440"/>
                 </a:solidFill>
@@ -11474,7 +11474,7 @@
       </p:sp>
       <p:pic>
         <p:nvPicPr>
-          <p:cNvPr id="9" name="mermaid diagram" descr="4e42b3d53ade2e3e.png"/>
+          <p:cNvPr id="9" name="mermaid diagram" descr="19f19ed905276654.png"/>
           <p:cNvPicPr>
             <a:picLocks noChangeAspect="1"/>
           </p:cNvPicPr>
@@ -11488,8 +11488,8 @@
         </p:blipFill>
         <p:spPr>
           <a:xfrm>
-            <a:off x="701972" y="1682496"/>
-            <a:ext cx="4443084" cy="4517136"/>
+            <a:off x="4052735" y="1694592"/>
+            <a:ext cx="4086225" cy="3471862"/>
           </a:xfrm>
           <a:prstGeom prst="rect">
             <a:avLst/>
@@ -11504,8 +11504,8 @@
         </p:nvSpPr>
         <p:spPr>
           <a:xfrm>
-            <a:off x="5761917" y="1956816"/>
-            <a:ext cx="5899425" cy="1877568"/>
+            <a:off x="530352" y="5242560"/>
+            <a:ext cx="11130991" cy="957072"/>
           </a:xfrm>
           <a:prstGeom prst="rect">
             <a:avLst/>
@@ -11518,11 +11518,6 @@
           </a:bodyPr>
           <a:lstStyle/>
           <a:p>
-            <a:pPr>
-              <a:spcAft>
-                <a:spcPts val="800"/>
-              </a:spcAft>
-            </a:pPr>
             <a:r>
               <a:rPr sz="1600" b="0" i="0">
                 <a:solidFill>

--- a/content/W04/D1/slides/C2_W04_D01_half2_STUDENT.pptx
+++ b/content/W04/D1/slides/C2_W04_D01_half2_STUDENT.pptx
@@ -13269,7 +13269,7 @@
                 </a:solidFill>
                 <a:latin typeface="Calibri"/>
               </a:rPr>
-              <a:t> the test of the redesign that this afternoon's tentative faculty block designs. Rs 74 lakh, the top-up to every other driver-week, is what the six weeks cost if nobody had changed, which is a floor on the cost and never a forecast.</a:t>
+              <a:t> the test of the redesign that this afternoon's tentative faculty block designs. Rs 74 lakh, the top-up the other driver-weeks received, is what the redesign would have paid over these six weeks if every driver had behaved the same: a floor on its cost, never a forecast.</a:t>
             </a:r>
           </a:p>
         </p:txBody>

--- a/content/W04/D1/slides/C2_W04_D01_half2_STUDENT.pptx
+++ b/content/W04/D1/slides/C2_W04_D01_half2_STUDENT.pptx
@@ -1196,17 +1196,27 @@
           </a:p>
           <a:p>
             <a:r>
-              <a:t>data: the 880 drivers outside the idle tail who joined before the launch made 1.90 trips an hour in</a:t>
-            </a:r>
-          </a:p>
-          <a:p>
-            <a:r>
-              <a:t>both windows; the three weeks with the most rider requests already read 1.60. The top-up budget is</a:t>
-            </a:r>
-          </a:p>
-          <a:p>
-            <a:r>
-              <a:t>finance's number, so finance decides what the floor may cost.</a:t>
+              <a:t>data: 880 is the 1,060 drivers there before the launch less the 180 in the idle tail, and they made</a:t>
+            </a:r>
+          </a:p>
+          <a:p>
+            <a:r>
+              <a:t>1.90 trips an hour in both windows; the rate stepped down in the launch week while weekly requests</a:t>
+            </a:r>
+          </a:p>
+          <a:p>
+            <a:r>
+              <a:t>stayed between about 41,000 and 44,000, and the three weeks with the most requests already read</a:t>
+            </a:r>
+          </a:p>
+          <a:p>
+            <a:r>
+              <a:t>1.60. If the 180 quit, their 33,440 trips would need about 17,600 more hours from the others. The</a:t>
+            </a:r>
+          </a:p>
+          <a:p>
+            <a:r>
+              <a:t>top-up budget is finance's number, so finance decides what the floor may cost.</a:t>
             </a:r>
           </a:p>
           <a:p>
@@ -5446,7 +5456,7 @@
         </p:nvGraphicFramePr>
         <p:xfrm>
           <a:off x="530352" y="1956816"/>
-          <a:ext cx="11130989" cy="3427984"/>
+          <a:ext cx="11130989" cy="3669792"/>
         </p:xfrm>
         <a:graphic>
           <a:graphicData uri="http://schemas.openxmlformats.org/drawingml/2006/table">
@@ -5584,7 +5594,7 @@
                           </a:solidFill>
                           <a:latin typeface="Calibri"/>
                         </a:rPr>
-                        <a:t>Asks what the scheme is for (riders picked up faster) and what would count as harm</a:t>
+                        <a:t>Asks what the scheme is for, what counts as harm, which decision rides on it and against what</a:t>
                       </a:r>
                     </a:p>
                   </a:txBody>
@@ -5652,7 +5662,7 @@
                           </a:solidFill>
                           <a:latin typeface="Calibri"/>
                         </a:rPr>
-                        <a:t>Goal, one north star with numerator, denominator and window, three guardrails, a leading input, the test</a:t>
+                        <a:t>Goal, one north star with its lines, three guardrails, a leading input, the test by zone</a:t>
                       </a:r>
                     </a:p>
                   </a:txBody>
@@ -5720,7 +5730,7 @@
                           </a:solidFill>
                           <a:latin typeface="Calibri"/>
                         </a:rPr>
-                        <a:t>Hours up 24, trips up 3: trips per online hour fell from 1.90 to 1.58 while requests rose</a:t>
+                        <a:t>Trips per online hour fell from 1.90 to 1.58, stepping down in the launch week, and the north star barely moved</a:t>
                       </a:r>
                     </a:p>
                   </a:txBody>
@@ -5731,7 +5741,7 @@
                   </a:tcPr>
                 </a:tc>
               </a:tr>
-              <a:tr h="611632">
+              <a:tr h="853440">
                 <a:tc>
                   <a:txBody>
                     <a:bodyPr/>
@@ -5744,7 +5754,7 @@
                           </a:solidFill>
                           <a:latin typeface="Calibri"/>
                         </a:rPr>
-                        <a:t>Segment</a:t>
+                        <a:t>Segment and zones</a:t>
                       </a:r>
                     </a:p>
                   </a:txBody>
@@ -5788,7 +5798,7 @@
                           </a:solidFill>
                           <a:latin typeface="Calibri"/>
                         </a:rPr>
-                        <a:t>180 drivers doubled their hours on fewer trips, mostly in thin outer zones</a:t>
+                        <a:t>180 drivers added hours on fewer trips, mostly in the outer zones, where waits fell 6.6 to 5.95 minutes at about Rs 46,000 per extra trip</a:t>
                       </a:r>
                     </a:p>
                   </a:txBody>
@@ -5856,7 +5866,7 @@
                           </a:solidFill>
                           <a:latin typeface="Calibri"/>
                         </a:rPr>
-                        <a:t>Don't extend; 61 percent of Rs 1.9 crore paid declining weeks; redesign to pay for trips, and test it first</a:t>
+                        <a:t>Hold it: Rs 2,836 per extra trip; floor only for weeks accepting half their offers; test by zone</a:t>
                       </a:r>
                     </a:p>
                   </a:txBody>
@@ -6315,7 +6325,7 @@
         </p:nvGraphicFramePr>
         <p:xfrm>
           <a:off x="530352" y="1956816"/>
-          <a:ext cx="11130990" cy="2688336"/>
+          <a:ext cx="11130990" cy="2930144"/>
         </p:xfrm>
         <a:graphic>
           <a:graphicData uri="http://schemas.openxmlformats.org/drawingml/2006/table">
@@ -6419,7 +6429,7 @@
                   </a:tcPr>
                 </a:tc>
               </a:tr>
-              <a:tr h="611632">
+              <a:tr h="853440">
                 <a:tc>
                   <a:txBody>
                     <a:bodyPr/>
@@ -6454,7 +6464,7 @@
                           </a:solidFill>
                           <a:latin typeface="Calibri"/>
                         </a:rPr>
-                        <a:t>The acceptance floor: some declines are fair, so set the floor in the gap the data shows, below 0.78 and above 0.46</a:t>
+                        <a:t>The acceptance floor: some declines are fair, so set it in the gap the data shows, above 0.46 and below 0.78, and test two levels, since on a real city the groups overlap</a:t>
                       </a:r>
                     </a:p>
                   </a:txBody>
@@ -6500,7 +6510,7 @@
                           </a:solidFill>
                           <a:latin typeface="Calibri"/>
                         </a:rPr>
-                        <a:t>The numerator needs a rider's request, so logging in cannot raise it; print the driver count beside the rate so logging off cannot flatter it</a:t>
+                        <a:t>Logging in cannot raise it, since each trip needs a rider's request; logging off can, so print the driver count beside the rate</a:t>
                       </a:r>
                     </a:p>
                   </a:txBody>
@@ -6958,8 +6968,8 @@
           <p:nvPr/>
         </p:nvGraphicFramePr>
         <p:xfrm>
-          <a:off x="530352" y="1956816"/>
-          <a:ext cx="11130990" cy="2968752"/>
+          <a:off x="530352" y="1904492"/>
+          <a:ext cx="11130990" cy="3114040"/>
         </p:xfrm>
         <a:graphic>
           <a:graphicData uri="http://schemas.openxmlformats.org/drawingml/2006/table">
@@ -6972,14 +6982,14 @@
                 <a:gridCol w="4771211"/>
                 <a:gridCol w="4967283"/>
               </a:tblGrid>
-              <a:tr h="335280">
+              <a:tr h="318008">
                 <a:tc>
                   <a:txBody>
                     <a:bodyPr/>
                     <a:lstStyle/>
                     <a:p>
                       <a:r>
-                        <a:rPr sz="1250" b="1" i="0">
+                        <a:rPr sz="1150" b="1" i="0">
                           <a:solidFill>
                             <a:srgbClr val="FFFFFF"/>
                           </a:solidFill>
@@ -7001,7 +7011,7 @@
                     <a:lstStyle/>
                     <a:p>
                       <a:r>
-                        <a:rPr sz="1250" b="1" i="0">
+                        <a:rPr sz="1150" b="1" i="0">
                           <a:solidFill>
                             <a:srgbClr val="FFFFFF"/>
                           </a:solidFill>
@@ -7023,7 +7033,7 @@
                     <a:lstStyle/>
                     <a:p>
                       <a:r>
-                        <a:rPr sz="1250" b="1" i="0">
+                        <a:rPr sz="1150" b="1" i="0">
                           <a:solidFill>
                             <a:srgbClr val="FFFFFF"/>
                           </a:solidFill>
@@ -7040,14 +7050,14 @@
                   </a:tcPr>
                 </a:tc>
               </a:tr>
-              <a:tr h="542544">
+              <a:tr h="318008">
                 <a:tc>
                   <a:txBody>
                     <a:bodyPr/>
                     <a:lstStyle/>
                     <a:p>
                       <a:r>
-                        <a:rPr sz="1200" b="0" i="0">
+                        <a:rPr sz="1100" b="0" i="0">
                           <a:solidFill>
                             <a:srgbClr val="1A1440"/>
                           </a:solidFill>
@@ -7069,7 +7079,7 @@
                     <a:lstStyle/>
                     <a:p>
                       <a:r>
-                        <a:rPr sz="1200" b="0" i="0">
+                        <a:rPr sz="1100" b="0" i="0">
                           <a:solidFill>
                             <a:srgbClr val="1A1440"/>
                           </a:solidFill>
@@ -7091,7 +7101,7 @@
                     <a:lstStyle/>
                     <a:p>
                       <a:r>
-                        <a:rPr sz="1200" b="0" i="0">
+                        <a:rPr sz="1100" b="0" i="0">
                           <a:solidFill>
                             <a:srgbClr val="1A1440"/>
                           </a:solidFill>
@@ -7108,14 +7118,14 @@
                   </a:tcPr>
                 </a:tc>
               </a:tr>
-              <a:tr h="542544">
+              <a:tr h="508000">
                 <a:tc>
                   <a:txBody>
                     <a:bodyPr/>
                     <a:lstStyle/>
                     <a:p>
                       <a:r>
-                        <a:rPr sz="1200" b="0" i="0">
+                        <a:rPr sz="1100" b="0" i="0">
                           <a:solidFill>
                             <a:srgbClr val="1A1440"/>
                           </a:solidFill>
@@ -7137,7 +7147,7 @@
                     <a:lstStyle/>
                     <a:p>
                       <a:r>
-                        <a:rPr sz="1200" b="0" i="0">
+                        <a:rPr sz="1100" b="0" i="0">
                           <a:solidFill>
                             <a:srgbClr val="1A1440"/>
                           </a:solidFill>
@@ -7159,13 +7169,13 @@
                     <a:lstStyle/>
                     <a:p>
                       <a:r>
-                        <a:rPr sz="1200" b="0" i="0">
+                        <a:rPr sz="1100" b="0" i="0">
                           <a:solidFill>
                             <a:srgbClr val="1A1440"/>
                           </a:solidFill>
                           <a:latin typeface="Calibri"/>
                         </a:rPr>
-                        <a:t>Suggested code still present at the next commit, per active developer, per week</a:t>
+                        <a:t>Suggested code still present at the next commit, per developer with a seat, per week</a:t>
                       </a:r>
                     </a:p>
                   </a:txBody>
@@ -7176,20 +7186,20 @@
                   </a:tcPr>
                 </a:tc>
               </a:tr>
-              <a:tr h="335280">
+              <a:tr h="318008">
                 <a:tc>
                   <a:txBody>
                     <a:bodyPr/>
                     <a:lstStyle/>
                     <a:p>
                       <a:r>
-                        <a:rPr sz="1200" b="0" i="0">
+                        <a:rPr sz="1100" b="0" i="0">
                           <a:solidFill>
                             <a:srgbClr val="1A1440"/>
                           </a:solidFill>
                           <a:latin typeface="Calibri"/>
                         </a:rPr>
-                        <a:t>Guardrails</a:t>
+                        <a:t>Read beside it</a:t>
                       </a:r>
                     </a:p>
                   </a:txBody>
@@ -7205,13 +7215,13 @@
                     <a:lstStyle/>
                     <a:p>
                       <a:r>
-                        <a:rPr sz="1200" b="0" i="0">
+                        <a:rPr sz="1100" b="0" i="0">
                           <a:solidFill>
                             <a:srgbClr val="1A1440"/>
                           </a:solidFill>
                           <a:latin typeface="Calibri"/>
                         </a:rPr>
-                        <a:t>Accepted share of offers; rider wait; top-up per trip</a:t>
+                        <a:t>The rider's wait, zone by zone</a:t>
                       </a:r>
                     </a:p>
                   </a:txBody>
@@ -7227,13 +7237,13 @@
                     <a:lstStyle/>
                     <a:p>
                       <a:r>
-                        <a:rPr sz="1200" b="0" i="0">
+                        <a:rPr sz="1100" b="0" i="0">
                           <a:solidFill>
                             <a:srgbClr val="1A1440"/>
                           </a:solidFill>
                           <a:latin typeface="Calibri"/>
                         </a:rPr>
-                        <a:t>Build failures; revert rate on suggested code; time to merge</a:t>
+                        <a:t>Time from first commit to merge</a:t>
                       </a:r>
                     </a:p>
                   </a:txBody>
@@ -7244,20 +7254,20 @@
                   </a:tcPr>
                 </a:tc>
               </a:tr>
-              <a:tr h="335280">
+              <a:tr h="508000">
                 <a:tc>
                   <a:txBody>
                     <a:bodyPr/>
                     <a:lstStyle/>
                     <a:p>
                       <a:r>
-                        <a:rPr sz="1200" b="0" i="0">
+                        <a:rPr sz="1100" b="0" i="0">
                           <a:solidFill>
                             <a:srgbClr val="1A1440"/>
                           </a:solidFill>
                           <a:latin typeface="Calibri"/>
                         </a:rPr>
-                        <a:t>Leading input</a:t>
+                        <a:t>Guardrails</a:t>
                       </a:r>
                     </a:p>
                   </a:txBody>
@@ -7273,13 +7283,13 @@
                     <a:lstStyle/>
                     <a:p>
                       <a:r>
-                        <a:rPr sz="1200" b="0" i="0">
+                        <a:rPr sz="1100" b="0" i="0">
                           <a:solidFill>
                             <a:srgbClr val="1A1440"/>
                           </a:solidFill>
                           <a:latin typeface="Calibri"/>
                         </a:rPr>
-                        <a:t>Acceptance in the launch week</a:t>
+                        <a:t>Accepted share of offers; rider wait; top-up per trip</a:t>
                       </a:r>
                     </a:p>
                   </a:txBody>
@@ -7295,13 +7305,13 @@
                     <a:lstStyle/>
                     <a:p>
                       <a:r>
-                        <a:rPr sz="1200" b="0" i="0">
+                        <a:rPr sz="1100" b="0" i="0">
                           <a:solidFill>
                             <a:srgbClr val="1A1440"/>
                           </a:solidFill>
                           <a:latin typeface="Calibri"/>
                         </a:rPr>
-                        <a:t>Acceptance rate, kept as an input and never the target</a:t>
+                        <a:t>Build failures and reverts on suggested code; security findings; rewritten lines</a:t>
                       </a:r>
                     </a:p>
                   </a:txBody>
@@ -7312,20 +7322,20 @@
                   </a:tcPr>
                 </a:tc>
               </a:tr>
-              <a:tr h="335280">
+              <a:tr h="318008">
                 <a:tc>
                   <a:txBody>
                     <a:bodyPr/>
                     <a:lstStyle/>
                     <a:p>
                       <a:r>
-                        <a:rPr sz="1200" b="0" i="0">
+                        <a:rPr sz="1100" b="0" i="0">
                           <a:solidFill>
                             <a:srgbClr val="1A1440"/>
                           </a:solidFill>
                           <a:latin typeface="Calibri"/>
                         </a:rPr>
-                        <a:t>The gaming</a:t>
+                        <a:t>Leading input</a:t>
                       </a:r>
                     </a:p>
                   </a:txBody>
@@ -7341,13 +7351,13 @@
                     <a:lstStyle/>
                     <a:p>
                       <a:r>
-                        <a:rPr sz="1200" b="0" i="0">
+                        <a:rPr sz="1100" b="0" i="0">
                           <a:solidFill>
                             <a:srgbClr val="1A1440"/>
                           </a:solidFill>
                           <a:latin typeface="Calibri"/>
                         </a:rPr>
-                        <a:t>Stay online, decline the offers</a:t>
+                        <a:t>Rider requests per online hour, by zone</a:t>
                       </a:r>
                     </a:p>
                   </a:txBody>
@@ -7363,13 +7373,13 @@
                     <a:lstStyle/>
                     <a:p>
                       <a:r>
-                        <a:rPr sz="1200" b="0" i="0">
+                        <a:rPr sz="1100" b="0" i="0">
                           <a:solidFill>
                             <a:srgbClr val="1A1440"/>
                           </a:solidFill>
                           <a:latin typeface="Calibri"/>
                         </a:rPr>
-                        <a:t>Accept short suggestions, then delete them</a:t>
+                        <a:t>Acceptance, an input nobody is paid on</a:t>
                       </a:r>
                     </a:p>
                   </a:txBody>
@@ -7380,20 +7390,20 @@
                   </a:tcPr>
                 </a:tc>
               </a:tr>
-              <a:tr h="542544">
+              <a:tr h="318008">
                 <a:tc>
                   <a:txBody>
                     <a:bodyPr/>
                     <a:lstStyle/>
                     <a:p>
                       <a:r>
-                        <a:rPr sz="1200" b="0" i="0">
+                        <a:rPr sz="1100" b="0" i="0">
                           <a:solidFill>
                             <a:srgbClr val="1A1440"/>
                           </a:solidFill>
                           <a:latin typeface="Calibri"/>
                         </a:rPr>
-                        <a:t>How it is settled</a:t>
+                        <a:t>The gaming</a:t>
                       </a:r>
                     </a:p>
                   </a:txBody>
@@ -7409,13 +7419,13 @@
                     <a:lstStyle/>
                     <a:p>
                       <a:r>
-                        <a:rPr sz="1200" b="0" i="0">
+                        <a:rPr sz="1100" b="0" i="0">
                           <a:solidFill>
                             <a:srgbClr val="1A1440"/>
                           </a:solidFill>
                           <a:latin typeface="Calibri"/>
                         </a:rPr>
-                        <a:t>A test of the redesign</a:t>
+                        <a:t>Stay online, decline the offers</a:t>
                       </a:r>
                     </a:p>
                   </a:txBody>
@@ -7431,13 +7441,13 @@
                     <a:lstStyle/>
                     <a:p>
                       <a:r>
-                        <a:rPr sz="1200" b="0" i="0">
+                        <a:rPr sz="1100" b="0" i="0">
                           <a:solidFill>
                             <a:srgbClr val="1A1440"/>
                           </a:solidFill>
                           <a:latin typeface="Calibri"/>
                         </a:rPr>
-                        <a:t>A holdout of developers without the assistant</a:t>
+                        <a:t>Fewer, safer suggestions shown; short ones accepted, then deleted</a:t>
                       </a:r>
                     </a:p>
                   </a:txBody>
@@ -7448,6 +7458,74 @@
                   </a:tcPr>
                 </a:tc>
               </a:tr>
+              <a:tr h="508000">
+                <a:tc>
+                  <a:txBody>
+                    <a:bodyPr/>
+                    <a:lstStyle/>
+                    <a:p>
+                      <a:r>
+                        <a:rPr sz="1100" b="0" i="0">
+                          <a:solidFill>
+                            <a:srgbClr val="1A1440"/>
+                          </a:solidFill>
+                          <a:latin typeface="Calibri"/>
+                        </a:rPr>
+                        <a:t>How it is settled</a:t>
+                      </a:r>
+                    </a:p>
+                  </a:txBody>
+                  <a:tcPr marL="101600" marR="101600" marT="38100" marB="38100" anchor="ctr">
+                    <a:solidFill>
+                      <a:srgbClr val="FFFFFF"/>
+                    </a:solidFill>
+                  </a:tcPr>
+                </a:tc>
+                <a:tc>
+                  <a:txBody>
+                    <a:bodyPr/>
+                    <a:lstStyle/>
+                    <a:p>
+                      <a:r>
+                        <a:rPr sz="1100" b="0" i="0">
+                          <a:solidFill>
+                            <a:srgbClr val="1A1440"/>
+                          </a:solidFill>
+                          <a:latin typeface="Calibri"/>
+                        </a:rPr>
+                        <a:t>A test with zones as the unit</a:t>
+                      </a:r>
+                    </a:p>
+                  </a:txBody>
+                  <a:tcPr marL="101600" marR="101600" marT="38100" marB="38100" anchor="ctr">
+                    <a:solidFill>
+                      <a:srgbClr val="FFFFFF"/>
+                    </a:solidFill>
+                  </a:tcPr>
+                </a:tc>
+                <a:tc>
+                  <a:txBody>
+                    <a:bodyPr/>
+                    <a:lstStyle/>
+                    <a:p>
+                      <a:r>
+                        <a:rPr sz="1100" b="0" i="0">
+                          <a:solidFill>
+                            <a:srgbClr val="1A1440"/>
+                          </a:solidFill>
+                          <a:latin typeface="Calibri"/>
+                        </a:rPr>
+                        <a:t>A test with teams as the unit, old rule against new</a:t>
+                      </a:r>
+                    </a:p>
+                  </a:txBody>
+                  <a:tcPr marL="101600" marR="101600" marT="38100" marB="38100" anchor="ctr">
+                    <a:solidFill>
+                      <a:srgbClr val="FFFFFF"/>
+                    </a:solidFill>
+                  </a:tcPr>
+                </a:tc>
+              </a:tr>
             </a:tbl>
           </a:graphicData>
         </a:graphic>
@@ -7460,8 +7538,8 @@
         </p:nvSpPr>
         <p:spPr>
           <a:xfrm>
-            <a:off x="530352" y="5181600"/>
-            <a:ext cx="11130991" cy="461264"/>
+            <a:off x="530352" y="5274564"/>
+            <a:ext cx="11130991" cy="703072"/>
           </a:xfrm>
           <a:prstGeom prst="rect">
             <a:avLst/>
@@ -7486,7 +7564,7 @@
                 </a:solidFill>
                 <a:latin typeface="Calibri"/>
               </a:rPr>
-              <a:t>Programme-written: the variant names no company and no figure.</a:t>
+              <a:t>Programme-written: the variant names no company and no figure. A commit is a saved change to the code; time to merge is how long a change waits before it joins the main code.</a:t>
             </a:r>
           </a:p>
         </p:txBody>
@@ -8992,7 +9070,7 @@
         </p:nvSpPr>
         <p:spPr>
           <a:xfrm>
-            <a:off x="530352" y="1956816"/>
+            <a:off x="530352" y="1876298"/>
             <a:ext cx="45720" cy="1036319"/>
           </a:xfrm>
           <a:prstGeom prst="roundRect">
@@ -9038,7 +9116,7 @@
         </p:nvSpPr>
         <p:spPr>
           <a:xfrm>
-            <a:off x="786384" y="1956816"/>
+            <a:off x="786384" y="1876298"/>
             <a:ext cx="10820095" cy="1036319"/>
           </a:xfrm>
           <a:prstGeom prst="rect">
@@ -9059,20 +9137,59 @@
                 </a:solidFill>
                 <a:latin typeface="Georgia"/>
               </a:rPr>
-              <a:t>"Pay for completed peak trips per enrolled driver online at peak, guarded by the share of offers accepted and the rider's wait, because paying for hours cost Rs 1.159 crore in six weeks for driver-weeks that declined most of what they were offered."</a:t>
-            </a:r>
-          </a:p>
-        </p:txBody>
-      </p:sp>
-      <p:sp>
-        <p:nvSpPr>
-          <p:cNvPr id="11" name="Rounded Rectangle 10"/>
+              <a:t>"Judge the scheme by completed peak trips per enrolled driver online at peak, guarded by the share of offers accepted and the rider's wait, because paying for hours cost Rs 1.159 crore in six weeks for driver-weeks that declined most of what they were offered."</a:t>
+            </a:r>
+          </a:p>
+        </p:txBody>
+      </p:sp>
+      <p:sp>
+        <p:nvSpPr>
+          <p:cNvPr id="11" name="TextBox 10"/>
+          <p:cNvSpPr txBox="1"/>
+          <p:nvPr/>
+        </p:nvSpPr>
+        <p:spPr>
+          <a:xfrm>
+            <a:off x="530352" y="3058922"/>
+            <a:ext cx="11130991" cy="772160"/>
+          </a:xfrm>
+          <a:prstGeom prst="rect">
+            <a:avLst/>
+          </a:prstGeom>
+          <a:noFill/>
+        </p:spPr>
+        <p:txBody>
+          <a:bodyPr wrap="square" anchor="t" lIns="0" rIns="0" tIns="0" bIns="0">
+            <a:spAutoFit/>
+          </a:bodyPr>
+          <a:lstStyle/>
+          <a:p>
+            <a:pPr>
+              <a:spcAft>
+                <a:spcPts val="800"/>
+              </a:spcAft>
+            </a:pPr>
+            <a:r>
+              <a:rPr sz="1600" b="0" i="0">
+                <a:solidFill>
+                  <a:srgbClr val="1A1440"/>
+                </a:solidFill>
+                <a:latin typeface="Calibri"/>
+              </a:rPr>
+              <a:t>The rule that follows from it: the Rs 300 floor stays only for driver-weeks that accept at least half their offers, an accepted trip later cancelled counting as declined.</a:t>
+            </a:r>
+          </a:p>
+        </p:txBody>
+      </p:sp>
+      <p:sp>
+        <p:nvSpPr>
+          <p:cNvPr id="12" name="Rounded Rectangle 11"/>
           <p:cNvSpPr/>
           <p:nvPr/>
         </p:nvSpPr>
         <p:spPr>
           <a:xfrm>
-            <a:off x="530352" y="3139440"/>
+            <a:off x="530352" y="3959098"/>
             <a:ext cx="11130991" cy="1074420"/>
           </a:xfrm>
           <a:prstGeom prst="roundRect">
@@ -9114,13 +9231,13 @@
       </p:sp>
       <p:sp>
         <p:nvSpPr>
-          <p:cNvPr id="12" name="Rounded Rectangle 11"/>
+          <p:cNvPr id="13" name="Rounded Rectangle 12"/>
           <p:cNvSpPr/>
           <p:nvPr/>
         </p:nvSpPr>
         <p:spPr>
           <a:xfrm>
-            <a:off x="676656" y="3267456"/>
+            <a:off x="676656" y="4087113"/>
             <a:ext cx="45720" cy="818388"/>
           </a:xfrm>
           <a:prstGeom prst="roundRect">
@@ -9160,13 +9277,13 @@
       </p:sp>
       <p:sp>
         <p:nvSpPr>
-          <p:cNvPr id="13" name="TextBox 12"/>
+          <p:cNvPr id="14" name="TextBox 13"/>
           <p:cNvSpPr txBox="1"/>
           <p:nvPr/>
         </p:nvSpPr>
         <p:spPr>
           <a:xfrm>
-            <a:off x="877824" y="3258312"/>
+            <a:off x="877824" y="4077969"/>
             <a:ext cx="10564063" cy="891540"/>
           </a:xfrm>
           <a:prstGeom prst="rect">
@@ -9196,20 +9313,20 @@
                 </a:solidFill>
                 <a:latin typeface="Calibri"/>
               </a:rPr>
-              <a:t>A number is safe to pay for only if hitting it requires the thing it stands for. A rate is two sums divided once, with its denominator named. A saving that assumes nobody changes is a floor on the cost, never a forecast.</a:t>
-            </a:r>
-          </a:p>
-        </p:txBody>
-      </p:sp>
-      <p:sp>
-        <p:nvSpPr>
-          <p:cNvPr id="14" name="Rounded Rectangle 13"/>
+              <a:t>A number is safe to pay for only if hitting it requires the thing it stands for. A rate is two sums divided once, with its denominator named. A saving is said as a range, with the assumption about how people respond beside it.</a:t>
+            </a:r>
+          </a:p>
+        </p:txBody>
+      </p:sp>
+      <p:sp>
+        <p:nvSpPr>
+          <p:cNvPr id="15" name="Rounded Rectangle 14"/>
           <p:cNvSpPr/>
           <p:nvPr/>
         </p:nvSpPr>
         <p:spPr>
           <a:xfrm>
-            <a:off x="530352" y="4378452"/>
+            <a:off x="530352" y="5198109"/>
             <a:ext cx="11130991" cy="807720"/>
           </a:xfrm>
           <a:prstGeom prst="roundRect">
@@ -9251,13 +9368,13 @@
       </p:sp>
       <p:sp>
         <p:nvSpPr>
-          <p:cNvPr id="15" name="Rounded Rectangle 14"/>
+          <p:cNvPr id="16" name="Rounded Rectangle 15"/>
           <p:cNvSpPr/>
           <p:nvPr/>
         </p:nvSpPr>
         <p:spPr>
           <a:xfrm>
-            <a:off x="676656" y="4506468"/>
+            <a:off x="676656" y="5326125"/>
             <a:ext cx="45720" cy="551688"/>
           </a:xfrm>
           <a:prstGeom prst="roundRect">
@@ -9297,13 +9414,13 @@
       </p:sp>
       <p:sp>
         <p:nvSpPr>
-          <p:cNvPr id="16" name="TextBox 15"/>
+          <p:cNvPr id="17" name="TextBox 16"/>
           <p:cNvSpPr txBox="1"/>
           <p:nvPr/>
         </p:nvSpPr>
         <p:spPr>
           <a:xfrm>
-            <a:off x="877824" y="4497324"/>
+            <a:off x="877824" y="5316981"/>
             <a:ext cx="10564063" cy="624840"/>
           </a:xfrm>
           <a:prstGeom prst="rect">
@@ -9340,7 +9457,7 @@
       </p:sp>
       <p:sp>
         <p:nvSpPr>
-          <p:cNvPr id="17" name="Oval 16"/>
+          <p:cNvPr id="18" name="Oval 17"/>
           <p:cNvSpPr/>
           <p:nvPr/>
         </p:nvSpPr>
@@ -9384,7 +9501,7 @@
       </p:sp>
       <p:sp>
         <p:nvSpPr>
-          <p:cNvPr id="18" name="TextBox 17"/>
+          <p:cNvPr id="19" name="TextBox 18"/>
           <p:cNvSpPr txBox="1"/>
           <p:nvPr/>
         </p:nvSpPr>
@@ -9419,7 +9536,7 @@
       </p:sp>
       <p:sp>
         <p:nvSpPr>
-          <p:cNvPr id="19" name="Oval 18"/>
+          <p:cNvPr id="20" name="Oval 19"/>
           <p:cNvSpPr/>
           <p:nvPr/>
         </p:nvSpPr>
@@ -9463,7 +9580,7 @@
       </p:sp>
       <p:sp>
         <p:nvSpPr>
-          <p:cNvPr id="20" name="TextBox 19"/>
+          <p:cNvPr id="21" name="TextBox 20"/>
           <p:cNvSpPr txBox="1"/>
           <p:nvPr/>
         </p:nvSpPr>
@@ -9498,7 +9615,7 @@
       </p:sp>
       <p:sp>
         <p:nvSpPr>
-          <p:cNvPr id="21" name="TextBox 20"/>
+          <p:cNvPr id="22" name="TextBox 21"/>
           <p:cNvSpPr txBox="1"/>
           <p:nvPr/>
         </p:nvSpPr>
@@ -9774,7 +9891,7 @@
       </p:sp>
       <p:pic>
         <p:nvPicPr>
-          <p:cNvPr id="9" name="mermaid diagram" descr="4ce8cc290dfb20dd.png"/>
+          <p:cNvPr id="9" name="mermaid diagram" descr="7e11d0c0378b0ef8.png"/>
           <p:cNvPicPr>
             <a:picLocks noChangeAspect="1"/>
           </p:cNvPicPr>
@@ -9789,7 +9906,7 @@
         <p:spPr>
           <a:xfrm>
             <a:off x="530352" y="1956816"/>
-            <a:ext cx="11130991" cy="1580240"/>
+            <a:ext cx="11130991" cy="1562725"/>
           </a:xfrm>
           <a:prstGeom prst="rect">
             <a:avLst/>
@@ -9804,7 +9921,7 @@
         </p:nvSpPr>
         <p:spPr>
           <a:xfrm>
-            <a:off x="530352" y="3683360"/>
+            <a:off x="530352" y="3665845"/>
             <a:ext cx="11130991" cy="1074420"/>
           </a:xfrm>
           <a:prstGeom prst="roundRect">
@@ -9852,7 +9969,7 @@
         </p:nvSpPr>
         <p:spPr>
           <a:xfrm>
-            <a:off x="676656" y="3811376"/>
+            <a:off x="676656" y="3793861"/>
             <a:ext cx="45720" cy="818388"/>
           </a:xfrm>
           <a:prstGeom prst="roundRect">
@@ -9898,7 +10015,7 @@
         </p:nvSpPr>
         <p:spPr>
           <a:xfrm>
-            <a:off x="877824" y="3802232"/>
+            <a:off x="877824" y="3784717"/>
             <a:ext cx="10564063" cy="891540"/>
           </a:xfrm>
           <a:prstGeom prst="rect">
@@ -10376,7 +10493,7 @@
         <p:spPr>
           <a:xfrm>
             <a:off x="530352" y="1956816"/>
-            <a:ext cx="3588410" cy="2154428"/>
+            <a:ext cx="3588410" cy="2344420"/>
           </a:xfrm>
           <a:prstGeom prst="roundRect">
             <a:avLst>
@@ -10568,7 +10685,7 @@
         <p:spPr>
           <a:xfrm>
             <a:off x="731519" y="3303524"/>
-            <a:ext cx="3186074" cy="581406"/>
+            <a:ext cx="3186074" cy="763016"/>
           </a:xfrm>
           <a:prstGeom prst="rect">
             <a:avLst/>
@@ -10589,7 +10706,7 @@
                 </a:solidFill>
                 <a:latin typeface="Calibri"/>
               </a:rPr>
-              <a:t>True for the 180 who sat idle online; the other 880 drivers held 1.90 trips an hour before and after the launch</a:t>
+              <a:t>True for the 180 in the idle tail; the other 880 who joined before the launch held 1.90 trips an hour, and the wait by zone shows any loss</a:t>
             </a:r>
           </a:p>
         </p:txBody>
@@ -10603,7 +10720,7 @@
         <p:spPr>
           <a:xfrm>
             <a:off x="4301642" y="1956816"/>
-            <a:ext cx="3588410" cy="2154428"/>
+            <a:ext cx="3588410" cy="2344420"/>
           </a:xfrm>
           <a:prstGeom prst="roundRect">
             <a:avLst>
@@ -10795,7 +10912,7 @@
         <p:spPr>
           <a:xfrm>
             <a:off x="4502810" y="3303524"/>
-            <a:ext cx="3186074" cy="399796"/>
+            <a:ext cx="3186074" cy="581406"/>
           </a:xfrm>
           <a:prstGeom prst="rect">
             <a:avLst/>
@@ -10816,7 +10933,7 @@
                 </a:solidFill>
                 <a:latin typeface="Calibri"/>
               </a:rPr>
-              <a:t>True that the floor was the promise; the redesign keeps the floor for drivers who accept</a:t>
+              <a:t>True that the floor was the promise; the redesign keeps it for drivers who accept at least half their offers</a:t>
             </a:r>
           </a:p>
         </p:txBody>
@@ -10830,7 +10947,7 @@
         <p:spPr>
           <a:xfrm>
             <a:off x="8072932" y="1956816"/>
-            <a:ext cx="3588410" cy="2154428"/>
+            <a:ext cx="3588410" cy="2344420"/>
           </a:xfrm>
           <a:prstGeom prst="roundRect">
             <a:avLst>
@@ -11022,7 +11139,7 @@
         <p:spPr>
           <a:xfrm>
             <a:off x="8274100" y="3303524"/>
-            <a:ext cx="3186074" cy="399796"/>
+            <a:ext cx="3186074" cy="581406"/>
           </a:xfrm>
           <a:prstGeom prst="rect">
             <a:avLst/>
@@ -11043,7 +11160,7 @@
                 </a:solidFill>
                 <a:latin typeface="Calibri"/>
               </a:rPr>
-              <a:t>Partly: the season moves requests, yet the three busiest weeks already read 1.60</a:t>
+              <a:t>Partly: the season moves requests, but the rate stepped from 1.88 to 1.64 in the launch week itself</a:t>
             </a:r>
           </a:p>
         </p:txBody>
@@ -11056,7 +11173,7 @@
         </p:nvSpPr>
         <p:spPr>
           <a:xfrm>
-            <a:off x="530352" y="4294124"/>
+            <a:off x="530352" y="4484116"/>
             <a:ext cx="11130991" cy="495807"/>
           </a:xfrm>
           <a:prstGeom prst="rect">
@@ -11516,7 +11633,7 @@
                 </a:solidFill>
                 <a:latin typeface="Calibri"/>
               </a:rPr>
-              <a:t>If drivers log off and real supply falls, which line of the definition would show it first?</a:t>
+              <a:t>If drivers log off and riders wait longer, which line tells the city head that riders are worse off?</a:t>
             </a:r>
           </a:p>
         </p:txBody>
@@ -12058,8 +12175,8 @@
         </p:blipFill>
         <p:spPr>
           <a:xfrm>
-            <a:off x="2544526" y="1664208"/>
-            <a:ext cx="7102642" cy="2933700"/>
+            <a:off x="2695188" y="1664208"/>
+            <a:ext cx="6801317" cy="2809240"/>
           </a:xfrm>
           <a:prstGeom prst="rect">
             <a:avLst/>
@@ -12074,7 +12191,7 @@
         </p:nvSpPr>
         <p:spPr>
           <a:xfrm>
-            <a:off x="530352" y="4634484"/>
+            <a:off x="530352" y="4510024"/>
             <a:ext cx="11130991" cy="316992"/>
           </a:xfrm>
           <a:prstGeom prst="rect">
@@ -12109,8 +12226,8 @@
         </p:nvSpPr>
         <p:spPr>
           <a:xfrm>
-            <a:off x="530352" y="4960620"/>
-            <a:ext cx="11130991" cy="1074420"/>
+            <a:off x="530352" y="4836160"/>
+            <a:ext cx="11130991" cy="1198880"/>
           </a:xfrm>
           <a:prstGeom prst="roundRect">
             <a:avLst>
@@ -12157,8 +12274,8 @@
         </p:nvSpPr>
         <p:spPr>
           <a:xfrm>
-            <a:off x="676656" y="5088636"/>
-            <a:ext cx="45720" cy="818388"/>
+            <a:off x="676656" y="4964176"/>
+            <a:ext cx="45720" cy="942848"/>
           </a:xfrm>
           <a:prstGeom prst="roundRect">
             <a:avLst>
@@ -12203,8 +12320,8 @@
         </p:nvSpPr>
         <p:spPr>
           <a:xfrm>
-            <a:off x="877824" y="5079492"/>
-            <a:ext cx="10564063" cy="891540"/>
+            <a:off x="877824" y="4955032"/>
+            <a:ext cx="10564063" cy="1016000"/>
           </a:xfrm>
           <a:prstGeom prst="rect">
             <a:avLst/>
@@ -12218,7 +12335,7 @@
           <a:lstStyle/>
           <a:p>
             <a:r>
-              <a:rPr sz="1500" b="1">
+              <a:rPr sz="1300" b="1">
                 <a:solidFill>
                   <a:srgbClr val="5B3FD6"/>
                 </a:solidFill>
@@ -12227,13 +12344,13 @@
               <a:t>Answer: c. </a:t>
             </a:r>
             <a:r>
-              <a:rPr sz="1500" b="0" i="0">
+              <a:rPr sz="1300" b="0" i="0">
                 <a:solidFill>
                   <a:srgbClr val="1A1440"/>
                 </a:solidFill>
                 <a:latin typeface="Calibri"/>
               </a:rPr>
-              <a:t>If drivers who serve riders log off, riders wait longer, and the median wait is the line that moves for riders; the shrinking denominator shows it too. The acceptance floor sits in the gap: no idle-tail week accepted more than 0.46 of its offers, and no other week online accepted fewer than 0.78.</a:t>
+              <a:t>If drivers who serve riders log off, riders wait longer, and the wait, read zone by zone, is the line that moves for riders; the shrinking count of drivers shows who left, while the north star would rise. The floor sits in the gap: no idle-tail week accepted more than 0.46 of its offers and no other week fewer than 0.78; counting an accepted trip later cancelled as declined moves the edges to 0.43 and 0.67, and half still sits between.</a:t>
             </a:r>
           </a:p>
         </p:txBody>
@@ -13128,7 +13245,7 @@
         <p:spPr>
           <a:xfrm>
             <a:off x="530352" y="3419856"/>
-            <a:ext cx="11130991" cy="1607820"/>
+            <a:ext cx="11130991" cy="1874519"/>
           </a:xfrm>
           <a:prstGeom prst="roundRect">
             <a:avLst>
@@ -13176,7 +13293,7 @@
         <p:spPr>
           <a:xfrm>
             <a:off x="676656" y="3547872"/>
-            <a:ext cx="45720" cy="1351788"/>
+            <a:ext cx="45720" cy="1618487"/>
           </a:xfrm>
           <a:prstGeom prst="roundRect">
             <a:avLst>
@@ -13222,7 +13339,7 @@
         <p:spPr>
           <a:xfrm>
             <a:off x="877824" y="3538728"/>
-            <a:ext cx="10564063" cy="1424940"/>
+            <a:ext cx="10564063" cy="1691639"/>
           </a:xfrm>
           <a:prstGeom prst="rect">
             <a:avLst/>
@@ -13242,7 +13359,7 @@
                 </a:solidFill>
                 <a:latin typeface="Calibri"/>
               </a:rPr>
-              <a:t>The assumption, stated. </a:t>
+              <a:t>The rule priced. </a:t>
             </a:r>
             <a:r>
               <a:rPr sz="1500" b="0" i="0">
@@ -13251,7 +13368,7 @@
                 </a:solidFill>
                 <a:latin typeface="Calibri"/>
               </a:rPr>
-              <a:t>Some idle drivers would start accepting enough to qualify under a rule that pays for trips, so between a fifth and a half of the idle tail's top-up would still be paid. </a:t>
+              <a:t>The Rs 300 floor stays, and a driver-week earns its top-up only if the driver accepted at least half the offers shown, an accepted trip later cancelled counting as declined. </a:t>
             </a:r>
             <a:r>
               <a:rPr sz="1500" b="1" i="0">
@@ -13260,6 +13377,24 @@
                 </a:solidFill>
                 <a:latin typeface="Calibri"/>
               </a:rPr>
+              <a:t>The assumption, stated.</a:t>
+            </a:r>
+            <a:r>
+              <a:rPr sz="1500" b="0" i="0">
+                <a:solidFill>
+                  <a:srgbClr val="1A1440"/>
+                </a:solidFill>
+                <a:latin typeface="Calibri"/>
+              </a:rPr>
+              <a:t> Some idle drivers would start accepting enough to qualify, so between a fifth and a half of the idle tail's top-up would still be paid. </a:t>
+            </a:r>
+            <a:r>
+              <a:rPr sz="1500" b="1" i="0">
+                <a:solidFill>
+                  <a:srgbClr val="1A1440"/>
+                </a:solidFill>
+                <a:latin typeface="Calibri"/>
+              </a:rPr>
               <a:t>What would settle it:</a:t>
             </a:r>
             <a:r>
@@ -13269,7 +13404,7 @@
                 </a:solidFill>
                 <a:latin typeface="Calibri"/>
               </a:rPr>
-              <a:t> the test of the redesign that this afternoon's tentative faculty block designs. Rs 74 lakh, the top-up the other driver-weeks received, is what the redesign would have paid over these six weeks if every driver had behaved the same: a floor on its cost, never a forecast.</a:t>
+              <a:t> the test of the redesign that this afternoon's tentative faculty block designs. Rs 74 lakh, what the other driver-weeks received, is what the rule would have paid had every driver behaved the same, so it is the least the redesign would cost.</a:t>
             </a:r>
           </a:p>
         </p:txBody>
@@ -13668,7 +13803,7 @@
                 </a:solidFill>
                 <a:latin typeface="Georgia"/>
               </a:rPr>
-              <a:t>Maxxsaver: a success orders per month would miss</a:t>
+              <a:t>Maxxsaver: fewer orders per user, bigger baskets</a:t>
             </a:r>
           </a:p>
         </p:txBody>
@@ -13717,7 +13852,7 @@
         <p:spPr>
           <a:xfrm>
             <a:off x="530352" y="1956816"/>
-            <a:ext cx="11130991" cy="2540000"/>
+            <a:ext cx="11130991" cy="2816352"/>
           </a:xfrm>
           <a:prstGeom prst="rect">
             <a:avLst/>
@@ -13751,7 +13886,7 @@
                 </a:solidFill>
                 <a:latin typeface="Calibri"/>
               </a:rPr>
-              <a:t> unlocks extra discounts once a cart passes a threshold. In the quarter to 30 June 2025 over 28 percent of Swiggy's monthly transacting users used it, Instamart's average order value rose 16 percent quarter on quarter to Rs 612, and cart consolidation led by Maxxsaver lowered order growth (Swiggy's Q1 FY26 shareholder letter, checked 12 October 2026). Orders per month would have read that success as a fall.</a:t>
+              <a:t> unlocks extra discounts once a cart passes a threshold. In the quarter to 30 June 2025 over 28 percent of its monthly transacting users used it, Instamart's average order value rose 16 percent quarter on quarter to Rs 612, and Swiggy wrote that some cart consolidation led by Maxxsaver (customers putting more into fewer, larger orders), with some low-value orders let go, lowered order growth (Q1 FY26 shareholder letter, checked 12 October 2026). Orders per user would have read that success as a fall.</a:t>
             </a:r>
           </a:p>
           <a:p>
@@ -13776,7 +13911,7 @@
                 </a:solidFill>
                 <a:latin typeface="Calibri"/>
               </a:rPr>
-              <a:t> defines net order value as GOV minus discounts (its Q1 FY26 letter), and in its Q1 FY27 letter stopped disclosing GOV "as NOV more accurately reflects underlying performance"; both checked 12 October 2026. The gross figure let discounts buy growth, so the headline moved to the net one.</a:t>
+              <a:t>, whose businesses include Zomato and Blinkit, defines net order value (NOV) as gross order value (GOV), what orders were worth, minus discounts (its Q1 FY26 letter), and in its Q1 FY27 letter stopped disclosing GOV "as NOV more accurately reflects underlying performance"; both checked 12 October 2026.</a:t>
             </a:r>
           </a:p>
         </p:txBody>
@@ -14245,7 +14380,7 @@
                 </a:solidFill>
                 <a:latin typeface="Calibri"/>
               </a:rPr>
-              <a:t>How would you measure the success of a new feature, and an AI coding assistant without rewarding deleted suggestions, when a screen asks it cold?</a:t>
+              <a:t>How would you measure the success of a new feature, and an AI coding assistant without rewarding deleted suggestions, when an interviewer asks it cold?</a:t>
             </a:r>
           </a:p>
         </p:txBody>
@@ -14679,7 +14814,7 @@
         </p:nvSpPr>
         <p:spPr>
           <a:xfrm>
-            <a:off x="530352" y="1914700"/>
+            <a:off x="530352" y="1682496"/>
             <a:ext cx="45720" cy="751840"/>
           </a:xfrm>
           <a:prstGeom prst="roundRect">
@@ -14725,7 +14860,7 @@
         </p:nvSpPr>
         <p:spPr>
           <a:xfrm>
-            <a:off x="786384" y="1914700"/>
+            <a:off x="786384" y="1682496"/>
             <a:ext cx="10820095" cy="751840"/>
           </a:xfrm>
           <a:prstGeom prst="rect">
@@ -14759,8 +14894,8 @@
         </p:nvSpPr>
         <p:spPr>
           <a:xfrm>
-            <a:off x="530352" y="2812844"/>
-            <a:ext cx="11130991" cy="807720"/>
+            <a:off x="530352" y="2580640"/>
+            <a:ext cx="11130991" cy="1074420"/>
           </a:xfrm>
           <a:prstGeom prst="roundRect">
             <a:avLst>
@@ -14807,8 +14942,8 @@
         </p:nvSpPr>
         <p:spPr>
           <a:xfrm>
-            <a:off x="676656" y="2940860"/>
-            <a:ext cx="45720" cy="551688"/>
+            <a:off x="676656" y="2708656"/>
+            <a:ext cx="45720" cy="818388"/>
           </a:xfrm>
           <a:prstGeom prst="roundRect">
             <a:avLst>
@@ -14853,8 +14988,8 @@
         </p:nvSpPr>
         <p:spPr>
           <a:xfrm>
-            <a:off x="877824" y="2931716"/>
-            <a:ext cx="10564063" cy="624840"/>
+            <a:off x="877824" y="2699512"/>
+            <a:ext cx="10564063" cy="891540"/>
           </a:xfrm>
           <a:prstGeom prst="rect">
             <a:avLst/>
@@ -14883,14 +15018,14 @@
                 </a:solidFill>
                 <a:latin typeface="Calibri"/>
               </a:rPr>
-              <a:t>What was the scheme meant to change: more drivers online, or riders picked up faster? Who is in it, and who pays? What would count as harm? Which window, against which baseline?</a:t>
+              <a:t>What was the scheme meant to change: more drivers online, or riders picked up faster? Who is in it, and who pays? What would count as harm? Which decision rides on the answer, and against which baseline?</a:t>
             </a:r>
           </a:p>
         </p:txBody>
       </p:sp>
       <p:pic>
         <p:nvPicPr>
-          <p:cNvPr id="14" name="mermaid diagram" descr="5fd5e726cb062cda.png"/>
+          <p:cNvPr id="14" name="mermaid diagram" descr="447b002fddc9322f.png"/>
           <p:cNvPicPr>
             <a:picLocks noChangeAspect="1"/>
           </p:cNvPicPr>
@@ -14904,8 +15039,8 @@
         </p:blipFill>
         <p:spPr>
           <a:xfrm>
-            <a:off x="530352" y="3785156"/>
-            <a:ext cx="11130991" cy="1228247"/>
+            <a:off x="530352" y="3819652"/>
+            <a:ext cx="11130991" cy="1266084"/>
           </a:xfrm>
           <a:prstGeom prst="rect">
             <a:avLst/>
@@ -14920,7 +15055,7 @@
         </p:nvSpPr>
         <p:spPr>
           <a:xfrm>
-            <a:off x="530352" y="5159707"/>
+            <a:off x="530352" y="5232040"/>
             <a:ext cx="11130991" cy="807720"/>
           </a:xfrm>
           <a:prstGeom prst="roundRect">
@@ -14968,7 +15103,7 @@
         </p:nvSpPr>
         <p:spPr>
           <a:xfrm>
-            <a:off x="676656" y="5287723"/>
+            <a:off x="676656" y="5360056"/>
             <a:ext cx="45720" cy="551688"/>
           </a:xfrm>
           <a:prstGeom prst="roundRect">
@@ -15014,7 +15149,7 @@
         </p:nvSpPr>
         <p:spPr>
           <a:xfrm>
-            <a:off x="877824" y="5278579"/>
+            <a:off x="877824" y="5350912"/>
             <a:ext cx="10564063" cy="624840"/>
           </a:xfrm>
           <a:prstGeom prst="rect">

--- a/content/W04/D1/slides/C2_W04_D01_half2_STUDENT.pptx
+++ b/content/W04/D1/slides/C2_W04_D01_half2_STUDENT.pptx
@@ -1372,7 +1372,7 @@
           <a:lstStyle/>
           <a:p>
             <a:r>
-              <a:t>LIVE, 2 minutes. Read the three cards in the roles' voices. The numbers on the cards come from the</a:t>
+              <a:t>LIVE, 2 minutes 30 seconds. Read the three cards in the roles' voices. The numbers on the cards come from the</a:t>
             </a:r>
           </a:p>
           <a:p>
@@ -1642,7 +1642,7 @@
           <a:lstStyle/>
           <a:p>
             <a:r>
-              <a:t>LIVE, 2 minutes. Groups compare their own saving with the range. A group that wrote "saves Rs 1.16</a:t>
+              <a:t>LIVE, 3 minutes: the comparison (2), then the scoring (1). Groups compare their own saving with the range. A group that wrote "saves Rs 1.16</a:t>
             </a:r>
           </a:p>
           <a:p>
@@ -1657,7 +1657,7 @@
           </a:p>
           <a:p>
             <a:r>
-              <a:t>the business is trying to do, and this one pays for trips. Then 1 minute of scoring.</a:t>
+              <a:t>the business is trying to do, and this one pays for trips. Then the scoring.</a:t>
             </a:r>
           </a:p>
           <a:p>
@@ -9994,7 +9994,7 @@
         <p:spPr>
           <a:xfrm>
             <a:off x="530352" y="1682496"/>
-            <a:ext cx="45720" cy="1889759"/>
+            <a:ext cx="45720" cy="1676400"/>
           </a:xfrm>
           <a:prstGeom prst="roundRect">
             <a:avLst>
@@ -10040,7 +10040,7 @@
         <p:spPr>
           <a:xfrm>
             <a:off x="786384" y="1682496"/>
-            <a:ext cx="4980279" cy="1889759"/>
+            <a:ext cx="4980279" cy="1676400"/>
           </a:xfrm>
           <a:prstGeom prst="rect">
             <a:avLst/>
@@ -10054,7 +10054,7 @@
           <a:lstStyle/>
           <a:p>
             <a:r>
-              <a:rPr sz="1600" b="0" i="1">
+              <a:rPr sz="1400" b="0" i="1">
                 <a:solidFill>
                   <a:srgbClr val="1A0F5C"/>
                 </a:solidFill>
@@ -10073,8 +10073,8 @@
         </p:nvSpPr>
         <p:spPr>
           <a:xfrm>
-            <a:off x="530352" y="3718560"/>
-            <a:ext cx="5291175" cy="1324864"/>
+            <a:off x="530352" y="3505200"/>
+            <a:ext cx="5291175" cy="944880"/>
           </a:xfrm>
           <a:prstGeom prst="rect">
             <a:avLst/>
@@ -10089,1299 +10089,379 @@
           <a:p>
             <a:pPr>
               <a:spcAft>
-                <a:spcPts val="800"/>
+                <a:spcPts val="700"/>
               </a:spcAft>
             </a:pPr>
             <a:r>
-              <a:rPr sz="1600" b="0" i="0">
+              <a:rPr sz="1400" b="0" i="0">
                 <a:solidFill>
                   <a:srgbClr val="1A1440"/>
                 </a:solidFill>
                 <a:latin typeface="Calibri"/>
               </a:rPr>
-              <a:t>The rule that follows from it: the Rs 300 floor stays only for driver-weeks that accept at least half their offers, an accepted trip later cancelled counting as declined.</a:t>
-            </a:r>
-          </a:p>
-        </p:txBody>
-      </p:sp>
-      <p:sp>
-        <p:nvSpPr>
-          <p:cNvPr id="12" name="Rectangle 11"/>
+              <a:t>The rule: the Rs 300 floor stays only for driver-weeks that accept at least half their offers, a cancelled trip counting as declined.</a:t>
+            </a:r>
+          </a:p>
+        </p:txBody>
+      </p:sp>
+      <p:graphicFrame>
+        <p:nvGraphicFramePr>
+          <p:cNvPr id="12" name="Table 11"/>
+          <p:cNvGraphicFramePr>
+            <a:graphicFrameLocks noGrp="1"/>
+          </p:cNvGraphicFramePr>
+          <p:nvPr/>
+        </p:nvGraphicFramePr>
+        <p:xfrm>
+          <a:off x="6370167" y="1682496"/>
+          <a:ext cx="5291175" cy="2554224"/>
+        </p:xfrm>
+        <a:graphic>
+          <a:graphicData uri="http://schemas.openxmlformats.org/drawingml/2006/table">
+            <a:tbl>
+              <a:tblPr firstRow="0" bandRow="0">
+                <a:tableStyleId>{2D5ABB26-0587-4C30-8999-92F81FD0307C}</a:tableStyleId>
+              </a:tblPr>
+              <a:tblGrid>
+                <a:gridCol w="2397009"/>
+                <a:gridCol w="2894166"/>
+              </a:tblGrid>
+              <a:tr h="335280">
+                <a:tc>
+                  <a:txBody>
+                    <a:bodyPr/>
+                    <a:lstStyle/>
+                    <a:p>
+                      <a:r>
+                        <a:rPr sz="1250" b="1" i="0">
+                          <a:solidFill>
+                            <a:srgbClr val="FFFFFF"/>
+                          </a:solidFill>
+                          <a:latin typeface="Calibri"/>
+                        </a:rPr>
+                        <a:t>Topic</a:t>
+                      </a:r>
+                    </a:p>
+                  </a:txBody>
+                  <a:tcPr marL="101600" marR="101600" marT="38100" marB="38100" anchor="ctr">
+                    <a:solidFill>
+                      <a:srgbClr val="1A0F5C"/>
+                    </a:solidFill>
+                  </a:tcPr>
+                </a:tc>
+                <a:tc>
+                  <a:txBody>
+                    <a:bodyPr/>
+                    <a:lstStyle/>
+                    <a:p>
+                      <a:r>
+                        <a:rPr sz="1250" b="1" i="0">
+                          <a:solidFill>
+                            <a:srgbClr val="FFFFFF"/>
+                          </a:solidFill>
+                          <a:latin typeface="Calibri"/>
+                        </a:rPr>
+                        <a:t>On Uber's scheme</a:t>
+                      </a:r>
+                    </a:p>
+                  </a:txBody>
+                  <a:tcPr marL="101600" marR="101600" marT="38100" marB="38100" anchor="ctr">
+                    <a:solidFill>
+                      <a:srgbClr val="1A0F5C"/>
+                    </a:solidFill>
+                  </a:tcPr>
+                </a:tc>
+              </a:tr>
+              <a:tr h="335280">
+                <a:tc>
+                  <a:txBody>
+                    <a:bodyPr/>
+                    <a:lstStyle/>
+                    <a:p>
+                      <a:r>
+                        <a:rPr sz="1200" b="0" i="0">
+                          <a:solidFill>
+                            <a:srgbClr val="1A1440"/>
+                          </a:solidFill>
+                          <a:latin typeface="Calibri"/>
+                        </a:rPr>
+                        <a:t>1. The proxy test</a:t>
+                      </a:r>
+                    </a:p>
+                  </a:txBody>
+                  <a:tcPr marL="101600" marR="101600" marT="38100" marB="38100" anchor="ctr">
+                    <a:solidFill>
+                      <a:srgbClr val="FFFFFF"/>
+                    </a:solidFill>
+                  </a:tcPr>
+                </a:tc>
+                <a:tc>
+                  <a:txBody>
+                    <a:bodyPr/>
+                    <a:lstStyle/>
+                    <a:p>
+                      <a:r>
+                        <a:rPr sz="1200" b="0" i="0">
+                          <a:solidFill>
+                            <a:srgbClr val="1A1440"/>
+                          </a:solidFill>
+                          <a:latin typeface="Calibri"/>
+                        </a:rPr>
+                        <a:t>Hours need no rider</a:t>
+                      </a:r>
+                    </a:p>
+                  </a:txBody>
+                  <a:tcPr marL="101600" marR="101600" marT="38100" marB="38100" anchor="ctr">
+                    <a:solidFill>
+                      <a:srgbClr val="FFFFFF"/>
+                    </a:solidFill>
+                  </a:tcPr>
+                </a:tc>
+              </a:tr>
+              <a:tr h="542544">
+                <a:tc>
+                  <a:txBody>
+                    <a:bodyPr/>
+                    <a:lstStyle/>
+                    <a:p>
+                      <a:r>
+                        <a:rPr sz="1200" b="0" i="0">
+                          <a:solidFill>
+                            <a:srgbClr val="1A1440"/>
+                          </a:solidFill>
+                          <a:latin typeface="Calibri"/>
+                        </a:rPr>
+                        <a:t>2. North star, guardrails</a:t>
+                      </a:r>
+                    </a:p>
+                  </a:txBody>
+                  <a:tcPr marL="101600" marR="101600" marT="38100" marB="38100" anchor="ctr">
+                    <a:solidFill>
+                      <a:srgbClr val="F4F2FA"/>
+                    </a:solidFill>
+                  </a:tcPr>
+                </a:tc>
+                <a:tc>
+                  <a:txBody>
+                    <a:bodyPr/>
+                    <a:lstStyle/>
+                    <a:p>
+                      <a:r>
+                        <a:rPr sz="1200" b="0" i="0">
+                          <a:solidFill>
+                            <a:srgbClr val="1A1440"/>
+                          </a:solidFill>
+                          <a:latin typeface="Calibri"/>
+                        </a:rPr>
+                        <a:t>Trips, with acceptance and the wait</a:t>
+                      </a:r>
+                    </a:p>
+                  </a:txBody>
+                  <a:tcPr marL="101600" marR="101600" marT="38100" marB="38100" anchor="ctr">
+                    <a:solidFill>
+                      <a:srgbClr val="F4F2FA"/>
+                    </a:solidFill>
+                  </a:tcPr>
+                </a:tc>
+              </a:tr>
+              <a:tr h="335280">
+                <a:tc>
+                  <a:txBody>
+                    <a:bodyPr/>
+                    <a:lstStyle/>
+                    <a:p>
+                      <a:r>
+                        <a:rPr sz="1200" b="0" i="0">
+                          <a:solidFill>
+                            <a:srgbClr val="1A1440"/>
+                          </a:solidFill>
+                          <a:latin typeface="Calibri"/>
+                        </a:rPr>
+                        <a:t>3. Leading, lagging</a:t>
+                      </a:r>
+                    </a:p>
+                  </a:txBody>
+                  <a:tcPr marL="101600" marR="101600" marT="38100" marB="38100" anchor="ctr">
+                    <a:solidFill>
+                      <a:srgbClr val="FFFFFF"/>
+                    </a:solidFill>
+                  </a:tcPr>
+                </a:tc>
+                <a:tc>
+                  <a:txBody>
+                    <a:bodyPr/>
+                    <a:lstStyle/>
+                    <a:p>
+                      <a:r>
+                        <a:rPr sz="1200" b="0" i="0">
+                          <a:solidFill>
+                            <a:srgbClr val="1A1440"/>
+                          </a:solidFill>
+                          <a:latin typeface="Calibri"/>
+                        </a:rPr>
+                        <a:t>Acceptance moved first</a:t>
+                      </a:r>
+                    </a:p>
+                  </a:txBody>
+                  <a:tcPr marL="101600" marR="101600" marT="38100" marB="38100" anchor="ctr">
+                    <a:solidFill>
+                      <a:srgbClr val="FFFFFF"/>
+                    </a:solidFill>
+                  </a:tcPr>
+                </a:tc>
+              </a:tr>
+              <a:tr h="335280">
+                <a:tc>
+                  <a:txBody>
+                    <a:bodyPr/>
+                    <a:lstStyle/>
+                    <a:p>
+                      <a:r>
+                        <a:rPr sz="1200" b="0" i="0">
+                          <a:solidFill>
+                            <a:srgbClr val="1A1440"/>
+                          </a:solidFill>
+                          <a:latin typeface="Calibri"/>
+                        </a:rPr>
+                        <a:t>4. The four lines</a:t>
+                      </a:r>
+                    </a:p>
+                  </a:txBody>
+                  <a:tcPr marL="101600" marR="101600" marT="38100" marB="38100" anchor="ctr">
+                    <a:solidFill>
+                      <a:srgbClr val="F4F2FA"/>
+                    </a:solidFill>
+                  </a:tcPr>
+                </a:tc>
+                <a:tc>
+                  <a:txBody>
+                    <a:bodyPr/>
+                    <a:lstStyle/>
+                    <a:p>
+                      <a:r>
+                        <a:rPr sz="1200" b="0" i="0">
+                          <a:solidFill>
+                            <a:srgbClr val="1A1440"/>
+                          </a:solidFill>
+                          <a:latin typeface="Calibri"/>
+                        </a:rPr>
+                        <a:t>All trips over all hours</a:t>
+                      </a:r>
+                    </a:p>
+                  </a:txBody>
+                  <a:tcPr marL="101600" marR="101600" marT="38100" marB="38100" anchor="ctr">
+                    <a:solidFill>
+                      <a:srgbClr val="F4F2FA"/>
+                    </a:solidFill>
+                  </a:tcPr>
+                </a:tc>
+              </a:tr>
+              <a:tr h="335280">
+                <a:tc>
+                  <a:txBody>
+                    <a:bodyPr/>
+                    <a:lstStyle/>
+                    <a:p>
+                      <a:r>
+                        <a:rPr sz="1200" b="0" i="0">
+                          <a:solidFill>
+                            <a:srgbClr val="1A1440"/>
+                          </a:solidFill>
+                          <a:latin typeface="Calibri"/>
+                        </a:rPr>
+                        <a:t>5. Gaming</a:t>
+                      </a:r>
+                    </a:p>
+                  </a:txBody>
+                  <a:tcPr marL="101600" marR="101600" marT="38100" marB="38100" anchor="ctr">
+                    <a:solidFill>
+                      <a:srgbClr val="FFFFFF"/>
+                    </a:solidFill>
+                  </a:tcPr>
+                </a:tc>
+                <a:tc>
+                  <a:txBody>
+                    <a:bodyPr/>
+                    <a:lstStyle/>
+                    <a:p>
+                      <a:r>
+                        <a:rPr sz="1200" b="0" i="0">
+                          <a:solidFill>
+                            <a:srgbClr val="1A1440"/>
+                          </a:solidFill>
+                          <a:latin typeface="Calibri"/>
+                        </a:rPr>
+                        <a:t>Pay for trips riders asked for</a:t>
+                      </a:r>
+                    </a:p>
+                  </a:txBody>
+                  <a:tcPr marL="101600" marR="101600" marT="38100" marB="38100" anchor="ctr">
+                    <a:solidFill>
+                      <a:srgbClr val="FFFFFF"/>
+                    </a:solidFill>
+                  </a:tcPr>
+                </a:tc>
+              </a:tr>
+              <a:tr h="335280">
+                <a:tc>
+                  <a:txBody>
+                    <a:bodyPr/>
+                    <a:lstStyle/>
+                    <a:p>
+                      <a:r>
+                        <a:rPr sz="1200" b="0" i="0">
+                          <a:solidFill>
+                            <a:srgbClr val="1A1440"/>
+                          </a:solidFill>
+                          <a:latin typeface="Calibri"/>
+                        </a:rPr>
+                        <a:t>6. The page</a:t>
+                      </a:r>
+                    </a:p>
+                  </a:txBody>
+                  <a:tcPr marL="101600" marR="101600" marT="38100" marB="38100" anchor="ctr">
+                    <a:solidFill>
+                      <a:srgbClr val="F4F2FA"/>
+                    </a:solidFill>
+                  </a:tcPr>
+                </a:tc>
+                <a:tc>
+                  <a:txBody>
+                    <a:bodyPr/>
+                    <a:lstStyle/>
+                    <a:p>
+                      <a:r>
+                        <a:rPr sz="1200" b="0" i="0">
+                          <a:solidFill>
+                            <a:srgbClr val="1A1440"/>
+                          </a:solidFill>
+                          <a:latin typeface="Calibri"/>
+                        </a:rPr>
+                        <a:t>Seven lines the city signs</a:t>
+                      </a:r>
+                    </a:p>
+                  </a:txBody>
+                  <a:tcPr marL="101600" marR="101600" marT="38100" marB="38100" anchor="ctr">
+                    <a:solidFill>
+                      <a:srgbClr val="F4F2FA"/>
+                    </a:solidFill>
+                  </a:tcPr>
+                </a:tc>
+              </a:tr>
+            </a:tbl>
+          </a:graphicData>
+        </a:graphic>
+      </p:graphicFrame>
+      <p:sp>
+        <p:nvSpPr>
+          <p:cNvPr id="13" name="Rounded Rectangle 12"/>
           <p:cNvSpPr/>
           <p:nvPr/>
         </p:nvSpPr>
         <p:spPr>
           <a:xfrm>
-            <a:off x="6734898" y="2249424"/>
-            <a:ext cx="4561713" cy="18288"/>
-          </a:xfrm>
-          <a:prstGeom prst="rect">
-            <a:avLst/>
-          </a:prstGeom>
-          <a:solidFill>
-            <a:srgbClr val="CFC9EE"/>
-          </a:solidFill>
-          <a:ln>
-            <a:noFill/>
-          </a:ln>
-          <a:effectLst/>
-        </p:spPr>
-        <p:style>
-          <a:lnRef idx="1">
-            <a:schemeClr val="accent1"/>
-          </a:lnRef>
-          <a:fillRef idx="3">
-            <a:schemeClr val="accent1"/>
-          </a:fillRef>
-          <a:effectRef idx="2">
-            <a:schemeClr val="accent1"/>
-          </a:effectRef>
-          <a:fontRef idx="minor">
-            <a:schemeClr val="lt1"/>
-          </a:fontRef>
-        </p:style>
-        <p:txBody>
-          <a:bodyPr rtlCol="0" anchor="ctr" wrap="square"/>
-          <a:lstStyle/>
-          <a:p>
-            <a:pPr algn="ctr"/>
-          </a:p>
-        </p:txBody>
-      </p:sp>
-      <p:sp>
-        <p:nvSpPr>
-          <p:cNvPr id="13" name="TextBox 12"/>
-          <p:cNvSpPr txBox="1"/>
-          <p:nvPr/>
-        </p:nvSpPr>
-        <p:spPr>
-          <a:xfrm>
-            <a:off x="6370167" y="1682496"/>
-            <a:ext cx="729462" cy="168656"/>
-          </a:xfrm>
-          <a:prstGeom prst="rect">
-            <a:avLst/>
-          </a:prstGeom>
-          <a:noFill/>
-        </p:spPr>
-        <p:txBody>
-          <a:bodyPr wrap="square" anchor="t" lIns="0" rIns="0" tIns="0" bIns="0">
-            <a:spAutoFit/>
-          </a:bodyPr>
-          <a:lstStyle/>
-          <a:p>
-            <a:pPr algn="ctr"/>
-            <a:r>
-              <a:rPr sz="800" b="1" i="0" spc="250">
-                <a:solidFill>
-                  <a:srgbClr val="5B3FD6"/>
-                </a:solidFill>
-                <a:latin typeface="Calibri"/>
-              </a:rPr>
-              <a:t>1</a:t>
-            </a:r>
-          </a:p>
-        </p:txBody>
-      </p:sp>
-      <p:sp>
-        <p:nvSpPr>
-          <p:cNvPr id="14" name="Oval 13"/>
-          <p:cNvSpPr/>
-          <p:nvPr/>
-        </p:nvSpPr>
-        <p:spPr>
-          <a:xfrm>
-            <a:off x="6634314" y="2157984"/>
-            <a:ext cx="201168" cy="201168"/>
-          </a:xfrm>
-          <a:prstGeom prst="ellipse">
-            <a:avLst/>
-          </a:prstGeom>
-          <a:solidFill>
-            <a:srgbClr val="5B3FD6"/>
-          </a:solidFill>
-          <a:ln>
-            <a:noFill/>
-          </a:ln>
-          <a:effectLst/>
-        </p:spPr>
-        <p:style>
-          <a:lnRef idx="1">
-            <a:schemeClr val="accent1"/>
-          </a:lnRef>
-          <a:fillRef idx="3">
-            <a:schemeClr val="accent1"/>
-          </a:fillRef>
-          <a:effectRef idx="2">
-            <a:schemeClr val="accent1"/>
-          </a:effectRef>
-          <a:fontRef idx="minor">
-            <a:schemeClr val="lt1"/>
-          </a:fontRef>
-        </p:style>
-        <p:txBody>
-          <a:bodyPr rtlCol="0" anchor="ctr" wrap="square"/>
-          <a:lstStyle/>
-          <a:p>
-            <a:pPr algn="ctr"/>
-          </a:p>
-        </p:txBody>
-      </p:sp>
-      <p:sp>
-        <p:nvSpPr>
-          <p:cNvPr id="15" name="Rounded Rectangle 14"/>
-          <p:cNvSpPr/>
-          <p:nvPr/>
-        </p:nvSpPr>
-        <p:spPr>
-          <a:xfrm>
-            <a:off x="6370167" y="2569464"/>
-            <a:ext cx="729462" cy="1940560"/>
-          </a:xfrm>
-          <a:prstGeom prst="roundRect">
-            <a:avLst>
-              <a:gd name="adj" fmla="val 5000"/>
-            </a:avLst>
-          </a:prstGeom>
-          <a:solidFill>
-            <a:srgbClr val="FFFFFF"/>
-          </a:solidFill>
-          <a:ln w="9525">
-            <a:solidFill>
-              <a:srgbClr val="E4E1F1"/>
-            </a:solidFill>
-          </a:ln>
-          <a:effectLst>
-            <a:outerShdw blurRad="76200" dist="19050" dir="5400000" algn="bl" rotWithShape="0">
-              <a:srgbClr val="1A0F5C">
-                <a:alpha val="12000"/>
-              </a:srgbClr>
-            </a:outerShdw>
-          </a:effectLst>
-        </p:spPr>
-        <p:style>
-          <a:lnRef idx="1">
-            <a:schemeClr val="accent1"/>
-          </a:lnRef>
-          <a:fillRef idx="3">
-            <a:schemeClr val="accent1"/>
-          </a:fillRef>
-          <a:effectRef idx="2">
-            <a:schemeClr val="accent1"/>
-          </a:effectRef>
-          <a:fontRef idx="minor">
-            <a:schemeClr val="lt1"/>
-          </a:fontRef>
-        </p:style>
-        <p:txBody>
-          <a:bodyPr rtlCol="0" anchor="ctr" wrap="square"/>
-          <a:lstStyle/>
-          <a:p>
-            <a:pPr algn="ctr"/>
-          </a:p>
-        </p:txBody>
-      </p:sp>
-      <p:sp>
-        <p:nvSpPr>
-          <p:cNvPr id="16" name="TextBox 15"/>
-          <p:cNvSpPr txBox="1"/>
-          <p:nvPr/>
-        </p:nvSpPr>
-        <p:spPr>
-          <a:xfrm>
-            <a:off x="6534759" y="2715768"/>
-            <a:ext cx="400278" cy="465836"/>
-          </a:xfrm>
-          <a:prstGeom prst="rect">
-            <a:avLst/>
-          </a:prstGeom>
-          <a:noFill/>
-        </p:spPr>
-        <p:txBody>
-          <a:bodyPr wrap="square" anchor="t" lIns="0" rIns="0" tIns="0" bIns="0">
-            <a:spAutoFit/>
-          </a:bodyPr>
-          <a:lstStyle/>
-          <a:p>
-            <a:pPr algn="l"/>
-            <a:r>
-              <a:rPr sz="1300" b="1" i="0">
-                <a:solidFill>
-                  <a:srgbClr val="1A0F5C"/>
-                </a:solidFill>
-                <a:latin typeface="Calibri"/>
-              </a:rPr>
-              <a:t>The proxy test</a:t>
-            </a:r>
-          </a:p>
-        </p:txBody>
-      </p:sp>
-      <p:sp>
-        <p:nvSpPr>
-          <p:cNvPr id="17" name="TextBox 16"/>
-          <p:cNvSpPr txBox="1"/>
-          <p:nvPr/>
-        </p:nvSpPr>
-        <p:spPr>
-          <a:xfrm>
-            <a:off x="6534759" y="3218180"/>
-            <a:ext cx="400278" cy="696976"/>
-          </a:xfrm>
-          <a:prstGeom prst="rect">
-            <a:avLst/>
-          </a:prstGeom>
-          <a:noFill/>
-        </p:spPr>
-        <p:txBody>
-          <a:bodyPr wrap="square" anchor="t" lIns="0" rIns="0" tIns="0" bIns="0">
-            <a:spAutoFit/>
-          </a:bodyPr>
-          <a:lstStyle/>
-          <a:p>
-            <a:pPr algn="l"/>
-            <a:r>
-              <a:rPr sz="1000" b="0" i="0">
-                <a:solidFill>
-                  <a:srgbClr val="6B6690"/>
-                </a:solidFill>
-                <a:latin typeface="Calibri"/>
-              </a:rPr>
-              <a:t>Hours need no rider; trips do.</a:t>
-            </a:r>
-          </a:p>
-        </p:txBody>
-      </p:sp>
-      <p:sp>
-        <p:nvSpPr>
-          <p:cNvPr id="18" name="TextBox 17"/>
-          <p:cNvSpPr txBox="1"/>
-          <p:nvPr/>
-        </p:nvSpPr>
-        <p:spPr>
-          <a:xfrm>
-            <a:off x="7282510" y="1682496"/>
-            <a:ext cx="729462" cy="168656"/>
-          </a:xfrm>
-          <a:prstGeom prst="rect">
-            <a:avLst/>
-          </a:prstGeom>
-          <a:noFill/>
-        </p:spPr>
-        <p:txBody>
-          <a:bodyPr wrap="square" anchor="t" lIns="0" rIns="0" tIns="0" bIns="0">
-            <a:spAutoFit/>
-          </a:bodyPr>
-          <a:lstStyle/>
-          <a:p>
-            <a:pPr algn="ctr"/>
-            <a:r>
-              <a:rPr sz="800" b="1" i="0" spc="250">
-                <a:solidFill>
-                  <a:srgbClr val="5B3FD6"/>
-                </a:solidFill>
-                <a:latin typeface="Calibri"/>
-              </a:rPr>
-              <a:t>2</a:t>
-            </a:r>
-          </a:p>
-        </p:txBody>
-      </p:sp>
-      <p:sp>
-        <p:nvSpPr>
-          <p:cNvPr id="19" name="Oval 18"/>
-          <p:cNvSpPr/>
-          <p:nvPr/>
-        </p:nvSpPr>
-        <p:spPr>
-          <a:xfrm>
-            <a:off x="7546657" y="2157984"/>
-            <a:ext cx="201168" cy="201168"/>
-          </a:xfrm>
-          <a:prstGeom prst="ellipse">
-            <a:avLst/>
-          </a:prstGeom>
-          <a:solidFill>
-            <a:srgbClr val="5B3FD6"/>
-          </a:solidFill>
-          <a:ln>
-            <a:noFill/>
-          </a:ln>
-          <a:effectLst/>
-        </p:spPr>
-        <p:style>
-          <a:lnRef idx="1">
-            <a:schemeClr val="accent1"/>
-          </a:lnRef>
-          <a:fillRef idx="3">
-            <a:schemeClr val="accent1"/>
-          </a:fillRef>
-          <a:effectRef idx="2">
-            <a:schemeClr val="accent1"/>
-          </a:effectRef>
-          <a:fontRef idx="minor">
-            <a:schemeClr val="lt1"/>
-          </a:fontRef>
-        </p:style>
-        <p:txBody>
-          <a:bodyPr rtlCol="0" anchor="ctr" wrap="square"/>
-          <a:lstStyle/>
-          <a:p>
-            <a:pPr algn="ctr"/>
-          </a:p>
-        </p:txBody>
-      </p:sp>
-      <p:sp>
-        <p:nvSpPr>
-          <p:cNvPr id="20" name="Rounded Rectangle 19"/>
-          <p:cNvSpPr/>
-          <p:nvPr/>
-        </p:nvSpPr>
-        <p:spPr>
-          <a:xfrm>
-            <a:off x="7282510" y="2569464"/>
-            <a:ext cx="729462" cy="1940560"/>
-          </a:xfrm>
-          <a:prstGeom prst="roundRect">
-            <a:avLst>
-              <a:gd name="adj" fmla="val 5000"/>
-            </a:avLst>
-          </a:prstGeom>
-          <a:solidFill>
-            <a:srgbClr val="FFFFFF"/>
-          </a:solidFill>
-          <a:ln w="9525">
-            <a:solidFill>
-              <a:srgbClr val="E4E1F1"/>
-            </a:solidFill>
-          </a:ln>
-          <a:effectLst>
-            <a:outerShdw blurRad="76200" dist="19050" dir="5400000" algn="bl" rotWithShape="0">
-              <a:srgbClr val="1A0F5C">
-                <a:alpha val="12000"/>
-              </a:srgbClr>
-            </a:outerShdw>
-          </a:effectLst>
-        </p:spPr>
-        <p:style>
-          <a:lnRef idx="1">
-            <a:schemeClr val="accent1"/>
-          </a:lnRef>
-          <a:fillRef idx="3">
-            <a:schemeClr val="accent1"/>
-          </a:fillRef>
-          <a:effectRef idx="2">
-            <a:schemeClr val="accent1"/>
-          </a:effectRef>
-          <a:fontRef idx="minor">
-            <a:schemeClr val="lt1"/>
-          </a:fontRef>
-        </p:style>
-        <p:txBody>
-          <a:bodyPr rtlCol="0" anchor="ctr" wrap="square"/>
-          <a:lstStyle/>
-          <a:p>
-            <a:pPr algn="ctr"/>
-          </a:p>
-        </p:txBody>
-      </p:sp>
-      <p:sp>
-        <p:nvSpPr>
-          <p:cNvPr id="21" name="TextBox 20"/>
-          <p:cNvSpPr txBox="1"/>
-          <p:nvPr/>
-        </p:nvSpPr>
-        <p:spPr>
-          <a:xfrm>
-            <a:off x="7447102" y="2715768"/>
-            <a:ext cx="400278" cy="895096"/>
-          </a:xfrm>
-          <a:prstGeom prst="rect">
-            <a:avLst/>
-          </a:prstGeom>
-          <a:noFill/>
-        </p:spPr>
-        <p:txBody>
-          <a:bodyPr wrap="square" anchor="t" lIns="0" rIns="0" tIns="0" bIns="0">
-            <a:spAutoFit/>
-          </a:bodyPr>
-          <a:lstStyle/>
-          <a:p>
-            <a:pPr algn="l"/>
-            <a:r>
-              <a:rPr sz="1300" b="1" i="0">
-                <a:solidFill>
-                  <a:srgbClr val="1A0F5C"/>
-                </a:solidFill>
-                <a:latin typeface="Calibri"/>
-              </a:rPr>
-              <a:t>North star and guardrails</a:t>
-            </a:r>
-          </a:p>
-        </p:txBody>
-      </p:sp>
-      <p:sp>
-        <p:nvSpPr>
-          <p:cNvPr id="22" name="TextBox 21"/>
-          <p:cNvSpPr txBox="1"/>
-          <p:nvPr/>
-        </p:nvSpPr>
-        <p:spPr>
-          <a:xfrm>
-            <a:off x="7447102" y="3647440"/>
-            <a:ext cx="400278" cy="1192276"/>
-          </a:xfrm>
-          <a:prstGeom prst="rect">
-            <a:avLst/>
-          </a:prstGeom>
-          <a:noFill/>
-        </p:spPr>
-        <p:txBody>
-          <a:bodyPr wrap="square" anchor="t" lIns="0" rIns="0" tIns="0" bIns="0">
-            <a:spAutoFit/>
-          </a:bodyPr>
-          <a:lstStyle/>
-          <a:p>
-            <a:pPr algn="l"/>
-            <a:r>
-              <a:rPr sz="1000" b="0" i="0">
-                <a:solidFill>
-                  <a:srgbClr val="6B6690"/>
-                </a:solidFill>
-                <a:latin typeface="Calibri"/>
-              </a:rPr>
-              <a:t>Trips per enrolled driver, with acceptance and the wait.</a:t>
-            </a:r>
-          </a:p>
-        </p:txBody>
-      </p:sp>
-      <p:sp>
-        <p:nvSpPr>
-          <p:cNvPr id="23" name="TextBox 22"/>
-          <p:cNvSpPr txBox="1"/>
-          <p:nvPr/>
-        </p:nvSpPr>
-        <p:spPr>
-          <a:xfrm>
-            <a:off x="8194852" y="1682496"/>
-            <a:ext cx="729462" cy="168656"/>
-          </a:xfrm>
-          <a:prstGeom prst="rect">
-            <a:avLst/>
-          </a:prstGeom>
-          <a:noFill/>
-        </p:spPr>
-        <p:txBody>
-          <a:bodyPr wrap="square" anchor="t" lIns="0" rIns="0" tIns="0" bIns="0">
-            <a:spAutoFit/>
-          </a:bodyPr>
-          <a:lstStyle/>
-          <a:p>
-            <a:pPr algn="ctr"/>
-            <a:r>
-              <a:rPr sz="800" b="1" i="0" spc="250">
-                <a:solidFill>
-                  <a:srgbClr val="5B3FD6"/>
-                </a:solidFill>
-                <a:latin typeface="Calibri"/>
-              </a:rPr>
-              <a:t>3</a:t>
-            </a:r>
-          </a:p>
-        </p:txBody>
-      </p:sp>
-      <p:sp>
-        <p:nvSpPr>
-          <p:cNvPr id="24" name="Oval 23"/>
-          <p:cNvSpPr/>
-          <p:nvPr/>
-        </p:nvSpPr>
-        <p:spPr>
-          <a:xfrm>
-            <a:off x="8459000" y="2157984"/>
-            <a:ext cx="201168" cy="201168"/>
-          </a:xfrm>
-          <a:prstGeom prst="ellipse">
-            <a:avLst/>
-          </a:prstGeom>
-          <a:solidFill>
-            <a:srgbClr val="5B3FD6"/>
-          </a:solidFill>
-          <a:ln>
-            <a:noFill/>
-          </a:ln>
-          <a:effectLst/>
-        </p:spPr>
-        <p:style>
-          <a:lnRef idx="1">
-            <a:schemeClr val="accent1"/>
-          </a:lnRef>
-          <a:fillRef idx="3">
-            <a:schemeClr val="accent1"/>
-          </a:fillRef>
-          <a:effectRef idx="2">
-            <a:schemeClr val="accent1"/>
-          </a:effectRef>
-          <a:fontRef idx="minor">
-            <a:schemeClr val="lt1"/>
-          </a:fontRef>
-        </p:style>
-        <p:txBody>
-          <a:bodyPr rtlCol="0" anchor="ctr" wrap="square"/>
-          <a:lstStyle/>
-          <a:p>
-            <a:pPr algn="ctr"/>
-          </a:p>
-        </p:txBody>
-      </p:sp>
-      <p:sp>
-        <p:nvSpPr>
-          <p:cNvPr id="25" name="Rounded Rectangle 24"/>
-          <p:cNvSpPr/>
-          <p:nvPr/>
-        </p:nvSpPr>
-        <p:spPr>
-          <a:xfrm>
-            <a:off x="8194852" y="2569464"/>
-            <a:ext cx="729462" cy="1940560"/>
-          </a:xfrm>
-          <a:prstGeom prst="roundRect">
-            <a:avLst>
-              <a:gd name="adj" fmla="val 5000"/>
-            </a:avLst>
-          </a:prstGeom>
-          <a:solidFill>
-            <a:srgbClr val="FFFFFF"/>
-          </a:solidFill>
-          <a:ln w="9525">
-            <a:solidFill>
-              <a:srgbClr val="E4E1F1"/>
-            </a:solidFill>
-          </a:ln>
-          <a:effectLst>
-            <a:outerShdw blurRad="76200" dist="19050" dir="5400000" algn="bl" rotWithShape="0">
-              <a:srgbClr val="1A0F5C">
-                <a:alpha val="12000"/>
-              </a:srgbClr>
-            </a:outerShdw>
-          </a:effectLst>
-        </p:spPr>
-        <p:style>
-          <a:lnRef idx="1">
-            <a:schemeClr val="accent1"/>
-          </a:lnRef>
-          <a:fillRef idx="3">
-            <a:schemeClr val="accent1"/>
-          </a:fillRef>
-          <a:effectRef idx="2">
-            <a:schemeClr val="accent1"/>
-          </a:effectRef>
-          <a:fontRef idx="minor">
-            <a:schemeClr val="lt1"/>
-          </a:fontRef>
-        </p:style>
-        <p:txBody>
-          <a:bodyPr rtlCol="0" anchor="ctr" wrap="square"/>
-          <a:lstStyle/>
-          <a:p>
-            <a:pPr algn="ctr"/>
-          </a:p>
-        </p:txBody>
-      </p:sp>
-      <p:sp>
-        <p:nvSpPr>
-          <p:cNvPr id="26" name="TextBox 25"/>
-          <p:cNvSpPr txBox="1"/>
-          <p:nvPr/>
-        </p:nvSpPr>
-        <p:spPr>
-          <a:xfrm>
-            <a:off x="8359444" y="2715768"/>
-            <a:ext cx="400278" cy="680466"/>
-          </a:xfrm>
-          <a:prstGeom prst="rect">
-            <a:avLst/>
-          </a:prstGeom>
-          <a:noFill/>
-        </p:spPr>
-        <p:txBody>
-          <a:bodyPr wrap="square" anchor="t" lIns="0" rIns="0" tIns="0" bIns="0">
-            <a:spAutoFit/>
-          </a:bodyPr>
-          <a:lstStyle/>
-          <a:p>
-            <a:pPr algn="l"/>
-            <a:r>
-              <a:rPr sz="1300" b="1" i="0">
-                <a:solidFill>
-                  <a:srgbClr val="1A0F5C"/>
-                </a:solidFill>
-                <a:latin typeface="Calibri"/>
-              </a:rPr>
-              <a:t>Leading and lagging</a:t>
-            </a:r>
-          </a:p>
-        </p:txBody>
-      </p:sp>
-      <p:sp>
-        <p:nvSpPr>
-          <p:cNvPr id="27" name="TextBox 26"/>
-          <p:cNvSpPr txBox="1"/>
-          <p:nvPr/>
-        </p:nvSpPr>
-        <p:spPr>
-          <a:xfrm>
-            <a:off x="8359444" y="3432810"/>
-            <a:ext cx="400278" cy="862076"/>
-          </a:xfrm>
-          <a:prstGeom prst="rect">
-            <a:avLst/>
-          </a:prstGeom>
-          <a:noFill/>
-        </p:spPr>
-        <p:txBody>
-          <a:bodyPr wrap="square" anchor="t" lIns="0" rIns="0" tIns="0" bIns="0">
-            <a:spAutoFit/>
-          </a:bodyPr>
-          <a:lstStyle/>
-          <a:p>
-            <a:pPr algn="l"/>
-            <a:r>
-              <a:rPr sz="1000" b="0" i="0">
-                <a:solidFill>
-                  <a:srgbClr val="6B6690"/>
-                </a:solidFill>
-                <a:latin typeface="Calibri"/>
-              </a:rPr>
-              <a:t>Acceptance moved in the launch week.</a:t>
-            </a:r>
-          </a:p>
-        </p:txBody>
-      </p:sp>
-      <p:sp>
-        <p:nvSpPr>
-          <p:cNvPr id="28" name="TextBox 27"/>
-          <p:cNvSpPr txBox="1"/>
-          <p:nvPr/>
-        </p:nvSpPr>
-        <p:spPr>
-          <a:xfrm>
-            <a:off x="9107195" y="1682496"/>
-            <a:ext cx="729462" cy="168656"/>
-          </a:xfrm>
-          <a:prstGeom prst="rect">
-            <a:avLst/>
-          </a:prstGeom>
-          <a:noFill/>
-        </p:spPr>
-        <p:txBody>
-          <a:bodyPr wrap="square" anchor="t" lIns="0" rIns="0" tIns="0" bIns="0">
-            <a:spAutoFit/>
-          </a:bodyPr>
-          <a:lstStyle/>
-          <a:p>
-            <a:pPr algn="ctr"/>
-            <a:r>
-              <a:rPr sz="800" b="1" i="0" spc="250">
-                <a:solidFill>
-                  <a:srgbClr val="5B3FD6"/>
-                </a:solidFill>
-                <a:latin typeface="Calibri"/>
-              </a:rPr>
-              <a:t>4</a:t>
-            </a:r>
-          </a:p>
-        </p:txBody>
-      </p:sp>
-      <p:sp>
-        <p:nvSpPr>
-          <p:cNvPr id="29" name="Oval 28"/>
-          <p:cNvSpPr/>
-          <p:nvPr/>
-        </p:nvSpPr>
-        <p:spPr>
-          <a:xfrm>
-            <a:off x="9371342" y="2157984"/>
-            <a:ext cx="201168" cy="201168"/>
-          </a:xfrm>
-          <a:prstGeom prst="ellipse">
-            <a:avLst/>
-          </a:prstGeom>
-          <a:solidFill>
-            <a:srgbClr val="5B3FD6"/>
-          </a:solidFill>
-          <a:ln>
-            <a:noFill/>
-          </a:ln>
-          <a:effectLst/>
-        </p:spPr>
-        <p:style>
-          <a:lnRef idx="1">
-            <a:schemeClr val="accent1"/>
-          </a:lnRef>
-          <a:fillRef idx="3">
-            <a:schemeClr val="accent1"/>
-          </a:fillRef>
-          <a:effectRef idx="2">
-            <a:schemeClr val="accent1"/>
-          </a:effectRef>
-          <a:fontRef idx="minor">
-            <a:schemeClr val="lt1"/>
-          </a:fontRef>
-        </p:style>
-        <p:txBody>
-          <a:bodyPr rtlCol="0" anchor="ctr" wrap="square"/>
-          <a:lstStyle/>
-          <a:p>
-            <a:pPr algn="ctr"/>
-          </a:p>
-        </p:txBody>
-      </p:sp>
-      <p:sp>
-        <p:nvSpPr>
-          <p:cNvPr id="30" name="Rounded Rectangle 29"/>
-          <p:cNvSpPr/>
-          <p:nvPr/>
-        </p:nvSpPr>
-        <p:spPr>
-          <a:xfrm>
-            <a:off x="9107195" y="2569464"/>
-            <a:ext cx="729462" cy="1940560"/>
-          </a:xfrm>
-          <a:prstGeom prst="roundRect">
-            <a:avLst>
-              <a:gd name="adj" fmla="val 5000"/>
-            </a:avLst>
-          </a:prstGeom>
-          <a:solidFill>
-            <a:srgbClr val="FFFFFF"/>
-          </a:solidFill>
-          <a:ln w="9525">
-            <a:solidFill>
-              <a:srgbClr val="E4E1F1"/>
-            </a:solidFill>
-          </a:ln>
-          <a:effectLst>
-            <a:outerShdw blurRad="76200" dist="19050" dir="5400000" algn="bl" rotWithShape="0">
-              <a:srgbClr val="1A0F5C">
-                <a:alpha val="12000"/>
-              </a:srgbClr>
-            </a:outerShdw>
-          </a:effectLst>
-        </p:spPr>
-        <p:style>
-          <a:lnRef idx="1">
-            <a:schemeClr val="accent1"/>
-          </a:lnRef>
-          <a:fillRef idx="3">
-            <a:schemeClr val="accent1"/>
-          </a:fillRef>
-          <a:effectRef idx="2">
-            <a:schemeClr val="accent1"/>
-          </a:effectRef>
-          <a:fontRef idx="minor">
-            <a:schemeClr val="lt1"/>
-          </a:fontRef>
-        </p:style>
-        <p:txBody>
-          <a:bodyPr rtlCol="0" anchor="ctr" wrap="square"/>
-          <a:lstStyle/>
-          <a:p>
-            <a:pPr algn="ctr"/>
-          </a:p>
-        </p:txBody>
-      </p:sp>
-      <p:sp>
-        <p:nvSpPr>
-          <p:cNvPr id="31" name="TextBox 30"/>
-          <p:cNvSpPr txBox="1"/>
-          <p:nvPr/>
-        </p:nvSpPr>
-        <p:spPr>
-          <a:xfrm>
-            <a:off x="9271787" y="2715768"/>
-            <a:ext cx="400278" cy="465836"/>
-          </a:xfrm>
-          <a:prstGeom prst="rect">
-            <a:avLst/>
-          </a:prstGeom>
-          <a:noFill/>
-        </p:spPr>
-        <p:txBody>
-          <a:bodyPr wrap="square" anchor="t" lIns="0" rIns="0" tIns="0" bIns="0">
-            <a:spAutoFit/>
-          </a:bodyPr>
-          <a:lstStyle/>
-          <a:p>
-            <a:pPr algn="l"/>
-            <a:r>
-              <a:rPr sz="1300" b="1" i="0">
-                <a:solidFill>
-                  <a:srgbClr val="1A0F5C"/>
-                </a:solidFill>
-                <a:latin typeface="Calibri"/>
-              </a:rPr>
-              <a:t>The four lines</a:t>
-            </a:r>
-          </a:p>
-        </p:txBody>
-      </p:sp>
-      <p:sp>
-        <p:nvSpPr>
-          <p:cNvPr id="32" name="TextBox 31"/>
-          <p:cNvSpPr txBox="1"/>
-          <p:nvPr/>
-        </p:nvSpPr>
-        <p:spPr>
-          <a:xfrm>
-            <a:off x="9271787" y="3218180"/>
-            <a:ext cx="400278" cy="862076"/>
-          </a:xfrm>
-          <a:prstGeom prst="rect">
-            <a:avLst/>
-          </a:prstGeom>
-          <a:noFill/>
-        </p:spPr>
-        <p:txBody>
-          <a:bodyPr wrap="square" anchor="t" lIns="0" rIns="0" tIns="0" bIns="0">
-            <a:spAutoFit/>
-          </a:bodyPr>
-          <a:lstStyle/>
-          <a:p>
-            <a:pPr algn="l"/>
-            <a:r>
-              <a:rPr sz="1000" b="0" i="0">
-                <a:solidFill>
-                  <a:srgbClr val="6B6690"/>
-                </a:solidFill>
-                <a:latin typeface="Calibri"/>
-              </a:rPr>
-              <a:t>A ratio of sums, its denominator named.</a:t>
-            </a:r>
-          </a:p>
-        </p:txBody>
-      </p:sp>
-      <p:sp>
-        <p:nvSpPr>
-          <p:cNvPr id="33" name="TextBox 32"/>
-          <p:cNvSpPr txBox="1"/>
-          <p:nvPr/>
-        </p:nvSpPr>
-        <p:spPr>
-          <a:xfrm>
-            <a:off x="10019538" y="1682496"/>
-            <a:ext cx="729462" cy="168656"/>
-          </a:xfrm>
-          <a:prstGeom prst="rect">
-            <a:avLst/>
-          </a:prstGeom>
-          <a:noFill/>
-        </p:spPr>
-        <p:txBody>
-          <a:bodyPr wrap="square" anchor="t" lIns="0" rIns="0" tIns="0" bIns="0">
-            <a:spAutoFit/>
-          </a:bodyPr>
-          <a:lstStyle/>
-          <a:p>
-            <a:pPr algn="ctr"/>
-            <a:r>
-              <a:rPr sz="800" b="1" i="0" spc="250">
-                <a:solidFill>
-                  <a:srgbClr val="5B3FD6"/>
-                </a:solidFill>
-                <a:latin typeface="Calibri"/>
-              </a:rPr>
-              <a:t>5</a:t>
-            </a:r>
-          </a:p>
-        </p:txBody>
-      </p:sp>
-      <p:sp>
-        <p:nvSpPr>
-          <p:cNvPr id="34" name="Oval 33"/>
-          <p:cNvSpPr/>
-          <p:nvPr/>
-        </p:nvSpPr>
-        <p:spPr>
-          <a:xfrm>
-            <a:off x="10283685" y="2157984"/>
-            <a:ext cx="201168" cy="201168"/>
-          </a:xfrm>
-          <a:prstGeom prst="ellipse">
-            <a:avLst/>
-          </a:prstGeom>
-          <a:solidFill>
-            <a:srgbClr val="5B3FD6"/>
-          </a:solidFill>
-          <a:ln>
-            <a:noFill/>
-          </a:ln>
-          <a:effectLst/>
-        </p:spPr>
-        <p:style>
-          <a:lnRef idx="1">
-            <a:schemeClr val="accent1"/>
-          </a:lnRef>
-          <a:fillRef idx="3">
-            <a:schemeClr val="accent1"/>
-          </a:fillRef>
-          <a:effectRef idx="2">
-            <a:schemeClr val="accent1"/>
-          </a:effectRef>
-          <a:fontRef idx="minor">
-            <a:schemeClr val="lt1"/>
-          </a:fontRef>
-        </p:style>
-        <p:txBody>
-          <a:bodyPr rtlCol="0" anchor="ctr" wrap="square"/>
-          <a:lstStyle/>
-          <a:p>
-            <a:pPr algn="ctr"/>
-          </a:p>
-        </p:txBody>
-      </p:sp>
-      <p:sp>
-        <p:nvSpPr>
-          <p:cNvPr id="35" name="Rounded Rectangle 34"/>
-          <p:cNvSpPr/>
-          <p:nvPr/>
-        </p:nvSpPr>
-        <p:spPr>
-          <a:xfrm>
-            <a:off x="10019538" y="2569464"/>
-            <a:ext cx="729462" cy="1940560"/>
-          </a:xfrm>
-          <a:prstGeom prst="roundRect">
-            <a:avLst>
-              <a:gd name="adj" fmla="val 5000"/>
-            </a:avLst>
-          </a:prstGeom>
-          <a:solidFill>
-            <a:srgbClr val="FFFFFF"/>
-          </a:solidFill>
-          <a:ln w="9525">
-            <a:solidFill>
-              <a:srgbClr val="E4E1F1"/>
-            </a:solidFill>
-          </a:ln>
-          <a:effectLst>
-            <a:outerShdw blurRad="76200" dist="19050" dir="5400000" algn="bl" rotWithShape="0">
-              <a:srgbClr val="1A0F5C">
-                <a:alpha val="12000"/>
-              </a:srgbClr>
-            </a:outerShdw>
-          </a:effectLst>
-        </p:spPr>
-        <p:style>
-          <a:lnRef idx="1">
-            <a:schemeClr val="accent1"/>
-          </a:lnRef>
-          <a:fillRef idx="3">
-            <a:schemeClr val="accent1"/>
-          </a:fillRef>
-          <a:effectRef idx="2">
-            <a:schemeClr val="accent1"/>
-          </a:effectRef>
-          <a:fontRef idx="minor">
-            <a:schemeClr val="lt1"/>
-          </a:fontRef>
-        </p:style>
-        <p:txBody>
-          <a:bodyPr rtlCol="0" anchor="ctr" wrap="square"/>
-          <a:lstStyle/>
-          <a:p>
-            <a:pPr algn="ctr"/>
-          </a:p>
-        </p:txBody>
-      </p:sp>
-      <p:sp>
-        <p:nvSpPr>
-          <p:cNvPr id="36" name="TextBox 35"/>
-          <p:cNvSpPr txBox="1"/>
-          <p:nvPr/>
-        </p:nvSpPr>
-        <p:spPr>
-          <a:xfrm>
-            <a:off x="10184130" y="2715768"/>
-            <a:ext cx="400278" cy="465836"/>
-          </a:xfrm>
-          <a:prstGeom prst="rect">
-            <a:avLst/>
-          </a:prstGeom>
-          <a:noFill/>
-        </p:spPr>
-        <p:txBody>
-          <a:bodyPr wrap="square" anchor="t" lIns="0" rIns="0" tIns="0" bIns="0">
-            <a:spAutoFit/>
-          </a:bodyPr>
-          <a:lstStyle/>
-          <a:p>
-            <a:pPr algn="l"/>
-            <a:r>
-              <a:rPr sz="1300" b="1" i="0">
-                <a:solidFill>
-                  <a:srgbClr val="1A0F5C"/>
-                </a:solidFill>
-                <a:latin typeface="Calibri"/>
-              </a:rPr>
-              <a:t>Resisting gaming</a:t>
-            </a:r>
-          </a:p>
-        </p:txBody>
-      </p:sp>
-      <p:sp>
-        <p:nvSpPr>
-          <p:cNvPr id="37" name="TextBox 36"/>
-          <p:cNvSpPr txBox="1"/>
-          <p:nvPr/>
-        </p:nvSpPr>
-        <p:spPr>
-          <a:xfrm>
-            <a:off x="10184130" y="3218180"/>
-            <a:ext cx="400278" cy="696976"/>
-          </a:xfrm>
-          <a:prstGeom prst="rect">
-            <a:avLst/>
-          </a:prstGeom>
-          <a:noFill/>
-        </p:spPr>
-        <p:txBody>
-          <a:bodyPr wrap="square" anchor="t" lIns="0" rIns="0" tIns="0" bIns="0">
-            <a:spAutoFit/>
-          </a:bodyPr>
-          <a:lstStyle/>
-          <a:p>
-            <a:pPr algn="l"/>
-            <a:r>
-              <a:rPr sz="1000" b="0" i="0">
-                <a:solidFill>
-                  <a:srgbClr val="6B6690"/>
-                </a:solidFill>
-                <a:latin typeface="Calibri"/>
-              </a:rPr>
-              <a:t>Pay for trips a rider asked for.</a:t>
-            </a:r>
-          </a:p>
-        </p:txBody>
-      </p:sp>
-      <p:sp>
-        <p:nvSpPr>
-          <p:cNvPr id="38" name="TextBox 37"/>
-          <p:cNvSpPr txBox="1"/>
-          <p:nvPr/>
-        </p:nvSpPr>
-        <p:spPr>
-          <a:xfrm>
-            <a:off x="10931880" y="1682496"/>
-            <a:ext cx="729462" cy="168656"/>
-          </a:xfrm>
-          <a:prstGeom prst="rect">
-            <a:avLst/>
-          </a:prstGeom>
-          <a:noFill/>
-        </p:spPr>
-        <p:txBody>
-          <a:bodyPr wrap="square" anchor="t" lIns="0" rIns="0" tIns="0" bIns="0">
-            <a:spAutoFit/>
-          </a:bodyPr>
-          <a:lstStyle/>
-          <a:p>
-            <a:pPr algn="ctr"/>
-            <a:r>
-              <a:rPr sz="800" b="1" i="0" spc="250">
-                <a:solidFill>
-                  <a:srgbClr val="5B3FD6"/>
-                </a:solidFill>
-                <a:latin typeface="Calibri"/>
-              </a:rPr>
-              <a:t>6</a:t>
-            </a:r>
-          </a:p>
-        </p:txBody>
-      </p:sp>
-      <p:sp>
-        <p:nvSpPr>
-          <p:cNvPr id="39" name="Oval 38"/>
-          <p:cNvSpPr/>
-          <p:nvPr/>
-        </p:nvSpPr>
-        <p:spPr>
-          <a:xfrm>
-            <a:off x="11196027" y="2157984"/>
-            <a:ext cx="201168" cy="201168"/>
-          </a:xfrm>
-          <a:prstGeom prst="ellipse">
-            <a:avLst/>
-          </a:prstGeom>
-          <a:solidFill>
-            <a:srgbClr val="D9A7FF"/>
-          </a:solidFill>
-          <a:ln>
-            <a:noFill/>
-          </a:ln>
-          <a:effectLst/>
-        </p:spPr>
-        <p:style>
-          <a:lnRef idx="1">
-            <a:schemeClr val="accent1"/>
-          </a:lnRef>
-          <a:fillRef idx="3">
-            <a:schemeClr val="accent1"/>
-          </a:fillRef>
-          <a:effectRef idx="2">
-            <a:schemeClr val="accent1"/>
-          </a:effectRef>
-          <a:fontRef idx="minor">
-            <a:schemeClr val="lt1"/>
-          </a:fontRef>
-        </p:style>
-        <p:txBody>
-          <a:bodyPr rtlCol="0" anchor="ctr" wrap="square"/>
-          <a:lstStyle/>
-          <a:p>
-            <a:pPr algn="ctr"/>
-          </a:p>
-        </p:txBody>
-      </p:sp>
-      <p:sp>
-        <p:nvSpPr>
-          <p:cNvPr id="40" name="Rounded Rectangle 39"/>
-          <p:cNvSpPr/>
-          <p:nvPr/>
-        </p:nvSpPr>
-        <p:spPr>
-          <a:xfrm>
-            <a:off x="10931880" y="2569464"/>
-            <a:ext cx="729462" cy="1940560"/>
-          </a:xfrm>
-          <a:prstGeom prst="roundRect">
-            <a:avLst>
-              <a:gd name="adj" fmla="val 5000"/>
-            </a:avLst>
-          </a:prstGeom>
-          <a:gradFill rotWithShape="1">
-            <a:gsLst>
-              <a:gs pos="0">
-                <a:srgbClr val="2C1A86"/>
-              </a:gs>
-              <a:gs pos="100000">
-                <a:srgbClr val="1A0F5C"/>
-              </a:gs>
-            </a:gsLst>
-            <a:lin scaled="0" ang="16200000"/>
-          </a:gradFill>
-          <a:ln>
-            <a:noFill/>
-          </a:ln>
-          <a:effectLst>
-            <a:outerShdw blurRad="76200" dist="19050" dir="5400000" algn="bl" rotWithShape="0">
-              <a:srgbClr val="1A0F5C">
-                <a:alpha val="12000"/>
-              </a:srgbClr>
-            </a:outerShdw>
-          </a:effectLst>
-        </p:spPr>
-        <p:style>
-          <a:lnRef idx="1">
-            <a:schemeClr val="accent1"/>
-          </a:lnRef>
-          <a:fillRef idx="3">
-            <a:schemeClr val="accent1"/>
-          </a:fillRef>
-          <a:effectRef idx="2">
-            <a:schemeClr val="accent1"/>
-          </a:effectRef>
-          <a:fontRef idx="minor">
-            <a:schemeClr val="lt1"/>
-          </a:fontRef>
-        </p:style>
-        <p:txBody>
-          <a:bodyPr rtlCol="0" anchor="ctr" wrap="square"/>
-          <a:lstStyle/>
-          <a:p>
-            <a:pPr algn="ctr"/>
-          </a:p>
-        </p:txBody>
-      </p:sp>
-      <p:sp>
-        <p:nvSpPr>
-          <p:cNvPr id="41" name="TextBox 40"/>
-          <p:cNvSpPr txBox="1"/>
-          <p:nvPr/>
-        </p:nvSpPr>
-        <p:spPr>
-          <a:xfrm>
-            <a:off x="11096472" y="2715768"/>
-            <a:ext cx="400278" cy="251205"/>
-          </a:xfrm>
-          <a:prstGeom prst="rect">
-            <a:avLst/>
-          </a:prstGeom>
-          <a:noFill/>
-        </p:spPr>
-        <p:txBody>
-          <a:bodyPr wrap="square" anchor="t" lIns="0" rIns="0" tIns="0" bIns="0">
-            <a:spAutoFit/>
-          </a:bodyPr>
-          <a:lstStyle/>
-          <a:p>
-            <a:pPr algn="l"/>
-            <a:r>
-              <a:rPr sz="1300" b="1" i="0">
-                <a:solidFill>
-                  <a:srgbClr val="FFFFFF"/>
-                </a:solidFill>
-                <a:latin typeface="Calibri"/>
-              </a:rPr>
-              <a:t>The page</a:t>
-            </a:r>
-          </a:p>
-        </p:txBody>
-      </p:sp>
-      <p:sp>
-        <p:nvSpPr>
-          <p:cNvPr id="42" name="TextBox 41"/>
-          <p:cNvSpPr txBox="1"/>
-          <p:nvPr/>
-        </p:nvSpPr>
-        <p:spPr>
-          <a:xfrm>
-            <a:off x="11096472" y="3003550"/>
-            <a:ext cx="400278" cy="696976"/>
-          </a:xfrm>
-          <a:prstGeom prst="rect">
-            <a:avLst/>
-          </a:prstGeom>
-          <a:noFill/>
-        </p:spPr>
-        <p:txBody>
-          <a:bodyPr wrap="square" anchor="t" lIns="0" rIns="0" tIns="0" bIns="0">
-            <a:spAutoFit/>
-          </a:bodyPr>
-          <a:lstStyle/>
-          <a:p>
-            <a:pPr algn="l"/>
-            <a:r>
-              <a:rPr sz="1000" b="0" i="0">
-                <a:solidFill>
-                  <a:srgbClr val="CFC9EE"/>
-                </a:solidFill>
-                <a:latin typeface="Calibri"/>
-              </a:rPr>
-              <a:t>Seven lines the city can sign.</a:t>
-            </a:r>
-          </a:p>
-        </p:txBody>
-      </p:sp>
-      <p:sp>
-        <p:nvSpPr>
-          <p:cNvPr id="43" name="Rounded Rectangle 42"/>
-          <p:cNvSpPr/>
-          <p:nvPr/>
-        </p:nvSpPr>
-        <p:spPr>
-          <a:xfrm>
-            <a:off x="6370167" y="4692904"/>
-            <a:ext cx="5291175" cy="1074420"/>
+            <a:off x="6370167" y="4492752"/>
+            <a:ext cx="5291175" cy="967740"/>
           </a:xfrm>
           <a:prstGeom prst="roundRect">
             <a:avLst>
@@ -11422,14 +10502,14 @@
       </p:sp>
       <p:sp>
         <p:nvSpPr>
-          <p:cNvPr id="44" name="Rounded Rectangle 43"/>
+          <p:cNvPr id="14" name="Rounded Rectangle 13"/>
           <p:cNvSpPr/>
           <p:nvPr/>
         </p:nvSpPr>
         <p:spPr>
           <a:xfrm>
-            <a:off x="6516471" y="4820920"/>
-            <a:ext cx="45720" cy="818388"/>
+            <a:off x="6516471" y="4620768"/>
+            <a:ext cx="45720" cy="711708"/>
           </a:xfrm>
           <a:prstGeom prst="roundRect">
             <a:avLst>
@@ -11468,14 +10548,14 @@
       </p:sp>
       <p:sp>
         <p:nvSpPr>
-          <p:cNvPr id="45" name="TextBox 44"/>
-          <p:cNvSpPr txBox="1"/>
-          <p:nvPr/>
-        </p:nvSpPr>
-        <p:spPr>
-          <a:xfrm>
-            <a:off x="6717639" y="4811776"/>
-            <a:ext cx="4724247" cy="891540"/>
+          <p:cNvPr id="15" name="TextBox 14"/>
+          <p:cNvSpPr txBox="1"/>
+          <p:nvPr/>
+        </p:nvSpPr>
+        <p:spPr>
+          <a:xfrm>
+            <a:off x="6717639" y="4611624"/>
+            <a:ext cx="4724247" cy="784860"/>
           </a:xfrm>
           <a:prstGeom prst="rect">
             <a:avLst/>
@@ -11489,7 +10569,7 @@
           <a:lstStyle/>
           <a:p>
             <a:r>
-              <a:rPr sz="1500" b="1">
+              <a:rPr sz="1300" b="1">
                 <a:solidFill>
                   <a:srgbClr val="5B3FD6"/>
                 </a:solidFill>
@@ -11498,7 +10578,7 @@
               <a:t>Tuesday's question. </a:t>
             </a:r>
             <a:r>
-              <a:rPr sz="1500" b="0" i="0">
+              <a:rPr sz="1300" b="0" i="0">
                 <a:solidFill>
                   <a:srgbClr val="1A1440"/>
                 </a:solidFill>
@@ -11511,7 +10591,7 @@
       </p:sp>
       <p:sp>
         <p:nvSpPr>
-          <p:cNvPr id="46" name="Oval 45"/>
+          <p:cNvPr id="16" name="Oval 15"/>
           <p:cNvSpPr/>
           <p:nvPr/>
         </p:nvSpPr>
@@ -11555,7 +10635,7 @@
       </p:sp>
       <p:sp>
         <p:nvSpPr>
-          <p:cNvPr id="47" name="TextBox 46"/>
+          <p:cNvPr id="17" name="TextBox 16"/>
           <p:cNvSpPr txBox="1"/>
           <p:nvPr/>
         </p:nvSpPr>
@@ -11590,7 +10670,7 @@
       </p:sp>
       <p:sp>
         <p:nvSpPr>
-          <p:cNvPr id="48" name="Oval 47"/>
+          <p:cNvPr id="18" name="Oval 17"/>
           <p:cNvSpPr/>
           <p:nvPr/>
         </p:nvSpPr>
@@ -11634,7 +10714,7 @@
       </p:sp>
       <p:sp>
         <p:nvSpPr>
-          <p:cNvPr id="49" name="TextBox 48"/>
+          <p:cNvPr id="19" name="TextBox 18"/>
           <p:cNvSpPr txBox="1"/>
           <p:nvPr/>
         </p:nvSpPr>
@@ -11669,7 +10749,7 @@
       </p:sp>
       <p:sp>
         <p:nvSpPr>
-          <p:cNvPr id="50" name="TextBox 49"/>
+          <p:cNvPr id="20" name="TextBox 19"/>
           <p:cNvSpPr txBox="1"/>
           <p:nvPr/>
         </p:nvSpPr>

--- a/content/W04/D1/slides/C2_W04_D01_half2_STUDENT.pptx
+++ b/content/W04/D1/slides/C2_W04_D01_half2_STUDENT.pptx
@@ -542,7 +542,22 @@
           </a:p>
           <a:p>
             <a:r>
-              <a:t>exercises/unguided/C2_W04_D01_redesign_STUDENT.md. Styles: the case method (roles with partly-right</a:t>
+              <a:t>exercises/unguided/C2_W04_D01_redesign_STUDENT.md; the notebook:</a:t>
+            </a:r>
+          </a:p>
+          <a:p>
+            <a:r>
+              <a:t>notebooks/C2_W04_D01_10_gaming_page_three_roles_STUDENT.ipynb, the page tested against each way of</a:t>
+            </a:r>
+          </a:p>
+          <a:p>
+            <a:r>
+              <a:t>gaming it and each role's objection tested on the tables, open on screen only if a group disputes a</a:t>
+            </a:r>
+          </a:p>
+          <a:p>
+            <a:r>
+              <a:t>card, and the room's self-study text after the day. Styles: the case method (roles with partly-right</a:t>
             </a:r>
           </a:p>
           <a:p>
@@ -707,17 +722,27 @@
           <a:lstStyle/>
           <a:p>
             <a:r>
-              <a:t>LIVE, 4 minutes. Pairs score both answers on the scorecard's seven criteria, 0 to 2 each, then</a:t>
-            </a:r>
-          </a:p>
-          <a:p>
-            <a:r>
-              <a:t>compare with the trainer's scores. A hire-grade answer scores 2 on the first three: clarified</a:t>
-            </a:r>
-          </a:p>
-          <a:p>
-            <a:r>
-              <a:t>scope, named the denominator and window, saw the paradox.</a:t>
+              <a:t>LIVE, 4 minutes. Pairs tick both answers against the seven checks printed in the transcript file</a:t>
+            </a:r>
+          </a:p>
+          <a:p>
+            <a:r>
+              <a:t>(yes, partly or no), then hear the trainer's reading from the scorecard. A hire-grade answer meets</a:t>
+            </a:r>
+          </a:p>
+          <a:p>
+            <a:r>
+              <a:t>the first three in full: clarified scope, named the denominator and window, saw the paradox. The</a:t>
+            </a:r>
+          </a:p>
+          <a:p>
+            <a:r>
+              <a:t>Rs 46,000 is the idle tail's top-up in the three outer zones over the extra trips those zones</a:t>
+            </a:r>
+          </a:p>
+          <a:p>
+            <a:r>
+              <a:t>fulfilled; notebook 11 derives it and the 6.6 to 5.95 minutes, and checks every number in the table.</a:t>
             </a:r>
           </a:p>
           <a:p>
@@ -962,7 +987,12 @@
           </a:p>
           <a:p>
             <a:r>
-              <a:t>the topic each tests. The trap item uses numbers other than today's.</a:t>
+              <a:t>the topic each tests. The trap item reuses chapter 8's idle-tail numbers, 2.1 times the hours and 12</a:t>
+            </a:r>
+          </a:p>
+          <a:p>
+            <a:r>
+              <a:t>percent fewer trips, which differ from anything the practice lab finds.</a:t>
             </a:r>
           </a:p>
           <a:p>
@@ -1127,12 +1157,17 @@
           </a:p>
           <a:p>
             <a:r>
-              <a:t>pre-read for Tuesday ships tonight. The TA lab now runs the same method on Kalpa Retail.</a:t>
-            </a:r>
-          </a:p>
-          <a:p>
-            <a:r>
-              <a:t>Transition: the lab.</a:t>
+              <a:t>pre-read for Tuesday ships tonight. Next comes the IITGN faculty block (tentative), or the metric</a:t>
+            </a:r>
+          </a:p>
+          <a:p>
+            <a:r>
+              <a:t>clinic in its place; the TA lab then runs the same method on Kalpa Retail.</a:t>
+            </a:r>
+          </a:p>
+          <a:p>
+            <a:r>
+              <a:t>Transition: the faculty block.</a:t>
             </a:r>
           </a:p>
         </p:txBody>
@@ -1552,22 +1587,27 @@
           <a:lstStyle/>
           <a:p>
             <a:r>
-              <a:t>LIVE, 2 minutes 30 seconds. The floor is the city's call; the data says a floor anywhere between the two numbers</a:t>
-            </a:r>
-          </a:p>
-          <a:p>
-            <a:r>
-              <a:t>stops the gaming without touching a driver who declines the odd bad trip. Say that the gap is this</a:t>
-            </a:r>
-          </a:p>
-          <a:p>
-            <a:r>
-              <a:t>clean because the data is synthetic; on a real city the two groups overlap and the floor is a</a:t>
-            </a:r>
-          </a:p>
-          <a:p>
-            <a:r>
-              <a:t>trade-off the test measures.</a:t>
+              <a:t>LIVE, 2 minutes 30 seconds. The acceptance floor is the city's call; the data says one anywhere between</a:t>
+            </a:r>
+          </a:p>
+          <a:p>
+            <a:r>
+              <a:t>the two numbers stops the gaming without touching a driver who declines the odd bad trip. Say that</a:t>
+            </a:r>
+          </a:p>
+          <a:p>
+            <a:r>
+              <a:t>the gap is this clean because the data is synthetic; on a real city the two groups overlap and where</a:t>
+            </a:r>
+          </a:p>
+          <a:p>
+            <a:r>
+              <a:t>the acceptance floor sits is a trade-off the test measures. A gate on a dozen offers is noisy for a</a:t>
+            </a:r>
+          </a:p>
+          <a:p>
+            <a:r>
+              <a:t>driver in a thin zone, so a minimum number of offers, or a four-week window, is part of that test.</a:t>
             </a:r>
           </a:p>
           <a:p>
@@ -1642,22 +1682,37 @@
           <a:lstStyle/>
           <a:p>
             <a:r>
-              <a:t>LIVE, 3 minutes: the comparison (2), then the scoring (1). Groups compare their own saving with the range. A group that wrote "saves Rs 1.16</a:t>
-            </a:r>
-          </a:p>
-          <a:p>
-            <a:r>
-              <a:t>crore" has assumed nobody changes; ask what the idle tail would do on Monday morning under the new</a:t>
-            </a:r>
-          </a:p>
-          <a:p>
-            <a:r>
-              <a:t>rule. Chapter 2's Maxxsaver made the same point from the other side: a north star has to match what</a:t>
-            </a:r>
-          </a:p>
-          <a:p>
-            <a:r>
-              <a:t>the business is trying to do, and this one pays for trips. Then the scoring.</a:t>
+              <a:t>LIVE, 3 minutes: the comparison (2), then the scoring (1). Groups compare their own saving with the</a:t>
+            </a:r>
+          </a:p>
+          <a:p>
+            <a:r>
+              <a:t>range, which notebook 10 prices. A group that wrote "saves Rs 1.16 crore" has assumed nobody</a:t>
+            </a:r>
+          </a:p>
+          <a:p>
+            <a:r>
+              <a:t>changes; ask what the idle tail would do on Monday morning under the new rule. Chapter 2's Maxxsaver</a:t>
+            </a:r>
+          </a:p>
+          <a:p>
+            <a:r>
+              <a:t>made the same point from the other side: a north star has to match what the business is trying to</a:t>
+            </a:r>
+          </a:p>
+          <a:p>
+            <a:r>
+              <a:t>do, and this one counts trips. Then the scoring, and name chapter 6's [D] question once: three</a:t>
+            </a:r>
+          </a:p>
+          <a:p>
+            <a:r>
+              <a:t>departments each want their own target, and round 3 was its answer, one page with each department's</a:t>
+            </a:r>
+          </a:p>
+          <a:p>
+            <a:r>
+              <a:t>worry written as a line.</a:t>
             </a:r>
           </a:p>
           <a:p>
@@ -1747,7 +1802,22 @@
           </a:p>
           <a:p>
             <a:r>
-              <a:t>trainer/C2_W04_D01_interview_scorecards_TRAINER.md. Styles: the case method in the interview room,</a:t>
+              <a:t>trainer/C2_W04_D01_interview_scorecards_TRAINER.md; the notebook:</a:t>
+            </a:r>
+          </a:p>
+          <a:p>
+            <a:r>
+              <a:t>notebooks/C2_W04_D01_11_new_feature_definition_page_STUDENT.ipynb, which checks every number of the</a:t>
+            </a:r>
+          </a:p>
+          <a:p>
+            <a:r>
+              <a:t>hire-grade answer on the data and drafts the coding assistant's page in its your-turn cell, the</a:t>
+            </a:r>
+          </a:p>
+          <a:p>
+            <a:r>
+              <a:t>room's self-study text after the day. Styles: the case method in the interview room,</a:t>
             </a:r>
           </a:p>
           <a:p>
@@ -5565,8 +5635,8 @@
         </p:nvSpPr>
         <p:spPr>
           <a:xfrm>
-            <a:off x="530352" y="1682496"/>
-            <a:ext cx="45720" cy="751840"/>
+            <a:off x="530352" y="1950213"/>
+            <a:ext cx="45720" cy="378460"/>
           </a:xfrm>
           <a:prstGeom prst="roundRect">
             <a:avLst>
@@ -5611,8 +5681,8 @@
         </p:nvSpPr>
         <p:spPr>
           <a:xfrm>
-            <a:off x="786384" y="1682496"/>
-            <a:ext cx="10820095" cy="751840"/>
+            <a:off x="786384" y="1950213"/>
+            <a:ext cx="10820095" cy="378460"/>
           </a:xfrm>
           <a:prstGeom prst="rect">
             <a:avLst/>
@@ -5626,7 +5696,7 @@
           <a:lstStyle/>
           <a:p>
             <a:r>
-              <a:rPr sz="1600" b="0" i="1">
+              <a:rPr sz="1100" b="0" i="1">
                 <a:solidFill>
                   <a:srgbClr val="1A0F5C"/>
                 </a:solidFill>
@@ -5645,8 +5715,8 @@
         </p:nvSpPr>
         <p:spPr>
           <a:xfrm>
-            <a:off x="530352" y="2580640"/>
-            <a:ext cx="11130991" cy="1074420"/>
+            <a:off x="530352" y="2474977"/>
+            <a:ext cx="11130991" cy="629920"/>
           </a:xfrm>
           <a:prstGeom prst="roundRect">
             <a:avLst>
@@ -5693,8 +5763,8 @@
         </p:nvSpPr>
         <p:spPr>
           <a:xfrm>
-            <a:off x="676656" y="2708656"/>
-            <a:ext cx="45720" cy="818388"/>
+            <a:off x="676656" y="2602993"/>
+            <a:ext cx="45720" cy="373888"/>
           </a:xfrm>
           <a:prstGeom prst="roundRect">
             <a:avLst>
@@ -5739,8 +5809,8 @@
         </p:nvSpPr>
         <p:spPr>
           <a:xfrm>
-            <a:off x="877824" y="2699512"/>
-            <a:ext cx="10564063" cy="891540"/>
+            <a:off x="877824" y="2593849"/>
+            <a:ext cx="10564063" cy="447040"/>
           </a:xfrm>
           <a:prstGeom prst="rect">
             <a:avLst/>
@@ -5754,7 +5824,7 @@
           <a:lstStyle/>
           <a:p>
             <a:r>
-              <a:rPr sz="1500" b="1">
+              <a:rPr sz="1000" b="1">
                 <a:solidFill>
                   <a:srgbClr val="5B3FD6"/>
                 </a:solidFill>
@@ -5763,7 +5833,7 @@
               <a:t>Clarify before any number. </a:t>
             </a:r>
             <a:r>
-              <a:rPr sz="1500" b="0" i="0">
+              <a:rPr sz="1000" b="0" i="0">
                 <a:solidFill>
                   <a:srgbClr val="1A1440"/>
                 </a:solidFill>
@@ -5776,7 +5846,7 @@
       </p:sp>
       <p:pic>
         <p:nvPicPr>
-          <p:cNvPr id="14" name="mermaid diagram" descr="447b002fddc9322f.png"/>
+          <p:cNvPr id="14" name="mermaid diagram" descr="0912f8328f1a101f.png"/>
           <p:cNvPicPr>
             <a:picLocks noChangeAspect="1"/>
           </p:cNvPicPr>
@@ -5790,8 +5860,8 @@
         </p:blipFill>
         <p:spPr>
           <a:xfrm>
-            <a:off x="530352" y="3819652"/>
-            <a:ext cx="11130991" cy="1266084"/>
+            <a:off x="530352" y="3269489"/>
+            <a:ext cx="11130991" cy="1299969"/>
           </a:xfrm>
           <a:prstGeom prst="rect">
             <a:avLst/>
@@ -5806,8 +5876,8 @@
         </p:nvSpPr>
         <p:spPr>
           <a:xfrm>
-            <a:off x="530352" y="5232040"/>
-            <a:ext cx="11130991" cy="807720"/>
+            <a:off x="530352" y="4715762"/>
+            <a:ext cx="11130991" cy="452120"/>
           </a:xfrm>
           <a:prstGeom prst="roundRect">
             <a:avLst>
@@ -5854,8 +5924,8 @@
         </p:nvSpPr>
         <p:spPr>
           <a:xfrm>
-            <a:off x="676656" y="5360056"/>
-            <a:ext cx="45720" cy="551688"/>
+            <a:off x="676656" y="4843778"/>
+            <a:ext cx="45720" cy="196088"/>
           </a:xfrm>
           <a:prstGeom prst="roundRect">
             <a:avLst>
@@ -5900,8 +5970,8 @@
         </p:nvSpPr>
         <p:spPr>
           <a:xfrm>
-            <a:off x="877824" y="5350912"/>
-            <a:ext cx="10564063" cy="624840"/>
+            <a:off x="877824" y="4834634"/>
+            <a:ext cx="10564063" cy="269240"/>
           </a:xfrm>
           <a:prstGeom prst="rect">
             <a:avLst/>
@@ -5915,7 +5985,7 @@
           <a:lstStyle/>
           <a:p>
             <a:r>
-              <a:rPr sz="1500" b="1">
+              <a:rPr sz="1000" b="1">
                 <a:solidFill>
                   <a:srgbClr val="5B3FD6"/>
                 </a:solidFill>
@@ -5924,7 +5994,7 @@
               <a:t>The trap the interviewer sets. </a:t>
             </a:r>
             <a:r>
-              <a:rPr sz="1500" b="0" i="0">
+              <a:rPr sz="1000" b="0" i="0">
                 <a:solidFill>
                   <a:srgbClr val="1A1440"/>
                 </a:solidFill>
@@ -5937,7 +6007,55 @@
       </p:sp>
       <p:sp>
         <p:nvSpPr>
-          <p:cNvPr id="18" name="Oval 17"/>
+          <p:cNvPr id="18" name="TextBox 17"/>
+          <p:cNvSpPr txBox="1"/>
+          <p:nvPr/>
+        </p:nvSpPr>
+        <p:spPr>
+          <a:xfrm>
+            <a:off x="530352" y="5332474"/>
+            <a:ext cx="11130991" cy="599440"/>
+          </a:xfrm>
+          <a:prstGeom prst="rect">
+            <a:avLst/>
+          </a:prstGeom>
+          <a:noFill/>
+        </p:spPr>
+        <p:txBody>
+          <a:bodyPr wrap="square" anchor="t" lIns="0" rIns="0" tIns="0" bIns="0">
+            <a:spAutoFit/>
+          </a:bodyPr>
+          <a:lstStyle/>
+          <a:p>
+            <a:pPr>
+              <a:spcAft>
+                <a:spcPts val="500"/>
+              </a:spcAft>
+            </a:pPr>
+            <a:r>
+              <a:rPr sz="1100" b="1" i="0">
+                <a:solidFill>
+                  <a:srgbClr val="1A1440"/>
+                </a:solidFill>
+                <a:latin typeface="Calibri"/>
+              </a:rPr>
+              <a:t>A test's unit</a:t>
+            </a:r>
+            <a:r>
+              <a:rPr sz="1100" b="0" i="0">
+                <a:solidFill>
+                  <a:srgbClr val="1A1440"/>
+                </a:solidFill>
+                <a:latin typeface="Calibri"/>
+              </a:rPr>
+              <a:t> is what gets the old rule or the new one: whole zones, single drivers, or the whole city switched between rules window by window. Drivers move between zones, so which unit fits is the question the tentative faculty block takes up.</a:t>
+            </a:r>
+          </a:p>
+        </p:txBody>
+      </p:sp>
+      <p:sp>
+        <p:nvSpPr>
+          <p:cNvPr id="19" name="Oval 18"/>
           <p:cNvSpPr/>
           <p:nvPr/>
         </p:nvSpPr>
@@ -5981,7 +6099,7 @@
       </p:sp>
       <p:sp>
         <p:nvSpPr>
-          <p:cNvPr id="19" name="TextBox 18"/>
+          <p:cNvPr id="20" name="TextBox 19"/>
           <p:cNvSpPr txBox="1"/>
           <p:nvPr/>
         </p:nvSpPr>
@@ -6016,7 +6134,7 @@
       </p:sp>
       <p:sp>
         <p:nvSpPr>
-          <p:cNvPr id="20" name="Oval 19"/>
+          <p:cNvPr id="21" name="Oval 20"/>
           <p:cNvSpPr/>
           <p:nvPr/>
         </p:nvSpPr>
@@ -6060,7 +6178,7 @@
       </p:sp>
       <p:sp>
         <p:nvSpPr>
-          <p:cNvPr id="21" name="TextBox 20"/>
+          <p:cNvPr id="22" name="TextBox 21"/>
           <p:cNvSpPr txBox="1"/>
           <p:nvPr/>
         </p:nvSpPr>
@@ -6095,7 +6213,7 @@
       </p:sp>
       <p:sp>
         <p:nvSpPr>
-          <p:cNvPr id="22" name="TextBox 21"/>
+          <p:cNvPr id="23" name="TextBox 22"/>
           <p:cNvSpPr txBox="1"/>
           <p:nvPr/>
         </p:nvSpPr>
@@ -6379,7 +6497,7 @@
         </p:nvGraphicFramePr>
         <p:xfrm>
           <a:off x="530352" y="1956816"/>
-          <a:ext cx="11130989" cy="3669792"/>
+          <a:ext cx="11130989" cy="3911600"/>
         </p:xfrm>
         <a:graphic>
           <a:graphicData uri="http://schemas.openxmlformats.org/drawingml/2006/table">
@@ -6585,7 +6703,7 @@
                           </a:solidFill>
                           <a:latin typeface="Calibri"/>
                         </a:rPr>
-                        <a:t>Goal, one north star with its lines, three guardrails, a leading input, the test by zone</a:t>
+                        <a:t>Goal, one north star with its lines, three guardrails, a leading input, the test with its unit</a:t>
                       </a:r>
                     </a:p>
                   </a:txBody>
@@ -6732,7 +6850,7 @@
                   </a:tcPr>
                 </a:tc>
               </a:tr>
-              <a:tr h="611632">
+              <a:tr h="853440">
                 <a:tc>
                   <a:txBody>
                     <a:bodyPr/>
@@ -6789,7 +6907,7 @@
                           </a:solidFill>
                           <a:latin typeface="Calibri"/>
                         </a:rPr>
-                        <a:t>Hold it: Rs 2,836 per extra trip; floor only for weeks accepting half their offers; test by zone</a:t>
+                        <a:t>Hold it: Rs 2,836 per extra trip, about Rs 7,400 net of the rise in requests; the Rs 300 floor only for weeks accepting half their offers; a test</a:t>
                       </a:r>
                     </a:p>
                   </a:txBody>
@@ -7248,7 +7366,7 @@
         </p:nvGraphicFramePr>
         <p:xfrm>
           <a:off x="530352" y="1956816"/>
-          <a:ext cx="11130990" cy="2930144"/>
+          <a:ext cx="11130990" cy="3413760"/>
         </p:xfrm>
         <a:graphic>
           <a:graphicData uri="http://schemas.openxmlformats.org/drawingml/2006/table">
@@ -7341,7 +7459,7 @@
                           </a:solidFill>
                           <a:latin typeface="Calibri"/>
                         </a:rPr>
-                        <a:t>Trips per online hour and the rider's wait: hours rose 24 percent and trips 3, so the rate fell from 1.90 to 1.58 and waits barely moved</a:t>
+                        <a:t>Trips per online hour and the rider's wait: hours rose 24 percent and trips 3, so the rate fell from 1.90 to 1.58 and waits fell only from 4.8 to 4.6 minutes</a:t>
                       </a:r>
                     </a:p>
                   </a:txBody>
@@ -7352,7 +7470,7 @@
                   </a:tcPr>
                 </a:tc>
               </a:tr>
-              <a:tr h="853440">
+              <a:tr h="1337056">
                 <a:tc>
                   <a:txBody>
                     <a:bodyPr/>
@@ -7387,7 +7505,7 @@
                           </a:solidFill>
                           <a:latin typeface="Calibri"/>
                         </a:rPr>
-                        <a:t>The acceptance floor: some declines are fair, so set it in the gap the data shows, above 0.46 and below 0.78, and test two levels, since on a real city the groups overlap</a:t>
+                        <a:t>The acceptance floor: some declines are fair, so set it in the gap the data shows, above 0.46 and below 0.78, or 0.43 and 0.67 once an accepted trip later cancelled counts as declined, and test two levels, since on a real city the groups overlap</a:t>
                       </a:r>
                     </a:p>
                   </a:txBody>
@@ -7891,8 +8009,8 @@
           <p:nvPr/>
         </p:nvGraphicFramePr>
         <p:xfrm>
-          <a:off x="530352" y="1904492"/>
-          <a:ext cx="11130990" cy="3114040"/>
+          <a:off x="530352" y="1682496"/>
+          <a:ext cx="11130989" cy="2743200"/>
         </p:xfrm>
         <a:graphic>
           <a:graphicData uri="http://schemas.openxmlformats.org/drawingml/2006/table">
@@ -7901,18 +8019,18 @@
                 <a:tableStyleId>{2D5ABB26-0587-4C30-8999-92F81FD0307C}</a:tableStyleId>
               </a:tblPr>
               <a:tblGrid>
-                <a:gridCol w="1392496"/>
-                <a:gridCol w="4771211"/>
-                <a:gridCol w="4967283"/>
+                <a:gridCol w="1537309"/>
+                <a:gridCol w="4796840"/>
+                <a:gridCol w="4796840"/>
               </a:tblGrid>
-              <a:tr h="318008">
+              <a:tr h="310896">
                 <a:tc>
                   <a:txBody>
                     <a:bodyPr/>
                     <a:lstStyle/>
                     <a:p>
                       <a:r>
-                        <a:rPr sz="1150" b="1" i="0">
+                        <a:rPr sz="950" b="1" i="0">
                           <a:solidFill>
                             <a:srgbClr val="FFFFFF"/>
                           </a:solidFill>
@@ -7934,7 +8052,7 @@
                     <a:lstStyle/>
                     <a:p>
                       <a:r>
-                        <a:rPr sz="1150" b="1" i="0">
+                        <a:rPr sz="950" b="1" i="0">
                           <a:solidFill>
                             <a:srgbClr val="FFFFFF"/>
                           </a:solidFill>
@@ -7956,7 +8074,7 @@
                     <a:lstStyle/>
                     <a:p>
                       <a:r>
-                        <a:rPr sz="1150" b="1" i="0">
+                        <a:rPr sz="950" b="1" i="0">
                           <a:solidFill>
                             <a:srgbClr val="FFFFFF"/>
                           </a:solidFill>
@@ -7973,14 +8091,14 @@
                   </a:tcPr>
                 </a:tc>
               </a:tr>
-              <a:tr h="318008">
+              <a:tr h="310896">
                 <a:tc>
                   <a:txBody>
                     <a:bodyPr/>
                     <a:lstStyle/>
                     <a:p>
                       <a:r>
-                        <a:rPr sz="1100" b="0" i="0">
+                        <a:rPr sz="900" b="0" i="0">
                           <a:solidFill>
                             <a:srgbClr val="1A1440"/>
                           </a:solidFill>
@@ -8002,7 +8120,7 @@
                     <a:lstStyle/>
                     <a:p>
                       <a:r>
-                        <a:rPr sz="1100" b="0" i="0">
+                        <a:rPr sz="900" b="0" i="0">
                           <a:solidFill>
                             <a:srgbClr val="1A1440"/>
                           </a:solidFill>
@@ -8024,7 +8142,7 @@
                     <a:lstStyle/>
                     <a:p>
                       <a:r>
-                        <a:rPr sz="1100" b="0" i="0">
+                        <a:rPr sz="900" b="0" i="0">
                           <a:solidFill>
                             <a:srgbClr val="1A1440"/>
                           </a:solidFill>
@@ -8041,14 +8159,14 @@
                   </a:tcPr>
                 </a:tc>
               </a:tr>
-              <a:tr h="508000">
+              <a:tr h="438912">
                 <a:tc>
                   <a:txBody>
                     <a:bodyPr/>
                     <a:lstStyle/>
                     <a:p>
                       <a:r>
-                        <a:rPr sz="1100" b="0" i="0">
+                        <a:rPr sz="900" b="0" i="0">
                           <a:solidFill>
                             <a:srgbClr val="1A1440"/>
                           </a:solidFill>
@@ -8070,7 +8188,7 @@
                     <a:lstStyle/>
                     <a:p>
                       <a:r>
-                        <a:rPr sz="1100" b="0" i="0">
+                        <a:rPr sz="900" b="0" i="0">
                           <a:solidFill>
                             <a:srgbClr val="1A1440"/>
                           </a:solidFill>
@@ -8092,7 +8210,7 @@
                     <a:lstStyle/>
                     <a:p>
                       <a:r>
-                        <a:rPr sz="1100" b="0" i="0">
+                        <a:rPr sz="900" b="0" i="0">
                           <a:solidFill>
                             <a:srgbClr val="1A1440"/>
                           </a:solidFill>
@@ -8109,14 +8227,14 @@
                   </a:tcPr>
                 </a:tc>
               </a:tr>
-              <a:tr h="318008">
+              <a:tr h="310896">
                 <a:tc>
                   <a:txBody>
                     <a:bodyPr/>
                     <a:lstStyle/>
                     <a:p>
                       <a:r>
-                        <a:rPr sz="1100" b="0" i="0">
+                        <a:rPr sz="900" b="0" i="0">
                           <a:solidFill>
                             <a:srgbClr val="1A1440"/>
                           </a:solidFill>
@@ -8138,7 +8256,7 @@
                     <a:lstStyle/>
                     <a:p>
                       <a:r>
-                        <a:rPr sz="1100" b="0" i="0">
+                        <a:rPr sz="900" b="0" i="0">
                           <a:solidFill>
                             <a:srgbClr val="1A1440"/>
                           </a:solidFill>
@@ -8160,7 +8278,7 @@
                     <a:lstStyle/>
                     <a:p>
                       <a:r>
-                        <a:rPr sz="1100" b="0" i="0">
+                        <a:rPr sz="900" b="0" i="0">
                           <a:solidFill>
                             <a:srgbClr val="1A1440"/>
                           </a:solidFill>
@@ -8177,14 +8295,14 @@
                   </a:tcPr>
                 </a:tc>
               </a:tr>
-              <a:tr h="508000">
+              <a:tr h="438912">
                 <a:tc>
                   <a:txBody>
                     <a:bodyPr/>
                     <a:lstStyle/>
                     <a:p>
                       <a:r>
-                        <a:rPr sz="1100" b="0" i="0">
+                        <a:rPr sz="900" b="0" i="0">
                           <a:solidFill>
                             <a:srgbClr val="1A1440"/>
                           </a:solidFill>
@@ -8206,7 +8324,7 @@
                     <a:lstStyle/>
                     <a:p>
                       <a:r>
-                        <a:rPr sz="1100" b="0" i="0">
+                        <a:rPr sz="900" b="0" i="0">
                           <a:solidFill>
                             <a:srgbClr val="1A1440"/>
                           </a:solidFill>
@@ -8228,7 +8346,7 @@
                     <a:lstStyle/>
                     <a:p>
                       <a:r>
-                        <a:rPr sz="1100" b="0" i="0">
+                        <a:rPr sz="900" b="0" i="0">
                           <a:solidFill>
                             <a:srgbClr val="1A1440"/>
                           </a:solidFill>
@@ -8245,14 +8363,14 @@
                   </a:tcPr>
                 </a:tc>
               </a:tr>
-              <a:tr h="318008">
+              <a:tr h="310896">
                 <a:tc>
                   <a:txBody>
                     <a:bodyPr/>
                     <a:lstStyle/>
                     <a:p>
                       <a:r>
-                        <a:rPr sz="1100" b="0" i="0">
+                        <a:rPr sz="900" b="0" i="0">
                           <a:solidFill>
                             <a:srgbClr val="1A1440"/>
                           </a:solidFill>
@@ -8274,7 +8392,7 @@
                     <a:lstStyle/>
                     <a:p>
                       <a:r>
-                        <a:rPr sz="1100" b="0" i="0">
+                        <a:rPr sz="900" b="0" i="0">
                           <a:solidFill>
                             <a:srgbClr val="1A1440"/>
                           </a:solidFill>
@@ -8296,7 +8414,7 @@
                     <a:lstStyle/>
                     <a:p>
                       <a:r>
-                        <a:rPr sz="1100" b="0" i="0">
+                        <a:rPr sz="900" b="0" i="0">
                           <a:solidFill>
                             <a:srgbClr val="1A1440"/>
                           </a:solidFill>
@@ -8313,14 +8431,14 @@
                   </a:tcPr>
                 </a:tc>
               </a:tr>
-              <a:tr h="318008">
+              <a:tr h="310896">
                 <a:tc>
                   <a:txBody>
                     <a:bodyPr/>
                     <a:lstStyle/>
                     <a:p>
                       <a:r>
-                        <a:rPr sz="1100" b="0" i="0">
+                        <a:rPr sz="900" b="0" i="0">
                           <a:solidFill>
                             <a:srgbClr val="1A1440"/>
                           </a:solidFill>
@@ -8342,7 +8460,7 @@
                     <a:lstStyle/>
                     <a:p>
                       <a:r>
-                        <a:rPr sz="1100" b="0" i="0">
+                        <a:rPr sz="900" b="0" i="0">
                           <a:solidFill>
                             <a:srgbClr val="1A1440"/>
                           </a:solidFill>
@@ -8364,7 +8482,7 @@
                     <a:lstStyle/>
                     <a:p>
                       <a:r>
-                        <a:rPr sz="1100" b="0" i="0">
+                        <a:rPr sz="900" b="0" i="0">
                           <a:solidFill>
                             <a:srgbClr val="1A1440"/>
                           </a:solidFill>
@@ -8381,14 +8499,14 @@
                   </a:tcPr>
                 </a:tc>
               </a:tr>
-              <a:tr h="508000">
+              <a:tr h="310896">
                 <a:tc>
                   <a:txBody>
                     <a:bodyPr/>
                     <a:lstStyle/>
                     <a:p>
                       <a:r>
-                        <a:rPr sz="1100" b="0" i="0">
+                        <a:rPr sz="900" b="0" i="0">
                           <a:solidFill>
                             <a:srgbClr val="1A1440"/>
                           </a:solidFill>
@@ -8410,13 +8528,13 @@
                     <a:lstStyle/>
                     <a:p>
                       <a:r>
-                        <a:rPr sz="1100" b="0" i="0">
+                        <a:rPr sz="900" b="0" i="0">
                           <a:solidFill>
                             <a:srgbClr val="1A1440"/>
                           </a:solidFill>
                           <a:latin typeface="Calibri"/>
                         </a:rPr>
-                        <a:t>A test with zones as the unit</a:t>
+                        <a:t>A test with its unit chosen: zones, or the city switched window by window</a:t>
                       </a:r>
                     </a:p>
                   </a:txBody>
@@ -8432,7 +8550,7 @@
                     <a:lstStyle/>
                     <a:p>
                       <a:r>
-                        <a:rPr sz="1100" b="0" i="0">
+                        <a:rPr sz="900" b="0" i="0">
                           <a:solidFill>
                             <a:srgbClr val="1A1440"/>
                           </a:solidFill>
@@ -8461,8 +8579,8 @@
         </p:nvSpPr>
         <p:spPr>
           <a:xfrm>
-            <a:off x="530352" y="5274564"/>
-            <a:ext cx="11130991" cy="703072"/>
+            <a:off x="530352" y="4681728"/>
+            <a:ext cx="11130991" cy="1324864"/>
           </a:xfrm>
           <a:prstGeom prst="rect">
             <a:avLst/>
@@ -8477,17 +8595,17 @@
           <a:p>
             <a:pPr>
               <a:spcAft>
-                <a:spcPts val="700"/>
+                <a:spcPts val="800"/>
               </a:spcAft>
             </a:pPr>
             <a:r>
-              <a:rPr sz="1400" b="0" i="0">
+              <a:rPr sz="1600" b="0" i="0">
                 <a:solidFill>
                   <a:srgbClr val="1A1440"/>
                 </a:solidFill>
                 <a:latin typeface="Calibri"/>
               </a:rPr>
-              <a:t>Programme-written: the variant names no company and no figure. A commit is a saved change to the code; time to merge is how long a change waits before it joins the main code.</a:t>
+              <a:t>Programme-written: the variant names no company and no figure. A commit is a saved change to the code; time to merge is how long a change waits before it joins the main code. A seat is one developer's paid licence, a revert undoes a change already made, and a security finding is a weakness a security scan or review reports.</a:t>
             </a:r>
           </a:p>
         </p:txBody>
@@ -9498,7 +9616,7 @@
                 </a:solidFill>
                 <a:latin typeface="Georgia"/>
               </a:rPr>
-              <a:t>"You have a number the scheme should pay for and two guardrails that catch the ways of hitting it that hurt riders. You have not tested whether the redesign moves it. The next 120 minutes design that test on this city: the unit you randomise, the metric, the guardrail and how long you run it before you look."</a:t>
+              <a:t>"You have a number the scheme should pay for and two guardrails that catch the ways of hitting it that hurt riders. You have not tested whether the redesign moves it. The next 120 minutes design that test: the unit you randomise, the metric, the guardrail and how long you run it before you look."</a:t>
             </a:r>
           </a:p>
         </p:txBody>
@@ -10099,7 +10217,7 @@
                 </a:solidFill>
                 <a:latin typeface="Calibri"/>
               </a:rPr>
-              <a:t>The rule: the Rs 300 floor stays only for driver-weeks that accept at least half their offers, a cancelled trip counting as declined.</a:t>
+              <a:t>The rule: the Rs 300 floor stays only for driver-weeks that accept at least half their offers, an accepted trip the driver later cancels counting as declined.</a:t>
             </a:r>
           </a:p>
         </p:txBody>
@@ -10114,7 +10232,7 @@
         </p:nvGraphicFramePr>
         <p:xfrm>
           <a:off x="6370167" y="1682496"/>
-          <a:ext cx="5291175" cy="2554224"/>
+          <a:ext cx="5291175" cy="2761488"/>
         </p:xfrm>
         <a:graphic>
           <a:graphicData uri="http://schemas.openxmlformats.org/drawingml/2006/table">
@@ -10299,7 +10417,7 @@
                           </a:solidFill>
                           <a:latin typeface="Calibri"/>
                         </a:rPr>
-                        <a:t>Acceptance moved first</a:t>
+                        <a:t>Acceptance settled first</a:t>
                       </a:r>
                     </a:p>
                   </a:txBody>
@@ -10310,7 +10428,7 @@
                   </a:tcPr>
                 </a:tc>
               </a:tr>
-              <a:tr h="335280">
+              <a:tr h="542544">
                 <a:tc>
                   <a:txBody>
                     <a:bodyPr/>
@@ -10345,7 +10463,7 @@
                           </a:solidFill>
                           <a:latin typeface="Calibri"/>
                         </a:rPr>
-                        <a:t>All trips over all hours</a:t>
+                        <a:t>Trips over drivers online, by week</a:t>
                       </a:r>
                     </a:p>
                   </a:txBody>
@@ -10460,7 +10578,7 @@
         </p:nvSpPr>
         <p:spPr>
           <a:xfrm>
-            <a:off x="6370167" y="4492752"/>
+            <a:off x="6370167" y="4700016"/>
             <a:ext cx="5291175" cy="967740"/>
           </a:xfrm>
           <a:prstGeom prst="roundRect">
@@ -10508,7 +10626,7 @@
         </p:nvSpPr>
         <p:spPr>
           <a:xfrm>
-            <a:off x="6516471" y="4620768"/>
+            <a:off x="6516471" y="4828032"/>
             <a:ext cx="45720" cy="711708"/>
           </a:xfrm>
           <a:prstGeom prst="roundRect">
@@ -10554,7 +10672,7 @@
         </p:nvSpPr>
         <p:spPr>
           <a:xfrm>
-            <a:off x="6717639" y="4611624"/>
+            <a:off x="6717639" y="4818888"/>
             <a:ext cx="4724247" cy="784860"/>
           </a:xfrm>
           <a:prstGeom prst="rect">
@@ -11031,7 +11149,7 @@
         </p:nvSpPr>
         <p:spPr>
           <a:xfrm>
-            <a:off x="530352" y="1956816"/>
+            <a:off x="530352" y="1853438"/>
             <a:ext cx="11130991" cy="541020"/>
           </a:xfrm>
           <a:prstGeom prst="roundRect">
@@ -11079,7 +11197,7 @@
         </p:nvSpPr>
         <p:spPr>
           <a:xfrm>
-            <a:off x="676656" y="2084832"/>
+            <a:off x="676656" y="1981454"/>
             <a:ext cx="45720" cy="284988"/>
           </a:xfrm>
           <a:prstGeom prst="roundRect">
@@ -11125,7 +11243,7 @@
         </p:nvSpPr>
         <p:spPr>
           <a:xfrm>
-            <a:off x="877824" y="2075688"/>
+            <a:off x="877824" y="1972310"/>
             <a:ext cx="10564063" cy="358140"/>
           </a:xfrm>
           <a:prstGeom prst="rect">
@@ -11168,8 +11286,8 @@
         </p:nvSpPr>
         <p:spPr>
           <a:xfrm>
-            <a:off x="530352" y="2662428"/>
-            <a:ext cx="11130991" cy="807720"/>
+            <a:off x="530352" y="2559050"/>
+            <a:ext cx="11130991" cy="1341120"/>
           </a:xfrm>
           <a:prstGeom prst="roundRect">
             <a:avLst>
@@ -11216,8 +11334,8 @@
         </p:nvSpPr>
         <p:spPr>
           <a:xfrm>
-            <a:off x="676656" y="2790444"/>
-            <a:ext cx="45720" cy="551688"/>
+            <a:off x="676656" y="2687066"/>
+            <a:ext cx="45720" cy="1085088"/>
           </a:xfrm>
           <a:prstGeom prst="roundRect">
             <a:avLst>
@@ -11262,8 +11380,8 @@
         </p:nvSpPr>
         <p:spPr>
           <a:xfrm>
-            <a:off x="877824" y="2781300"/>
-            <a:ext cx="10564063" cy="624840"/>
+            <a:off x="877824" y="2677922"/>
+            <a:ext cx="10564063" cy="1158240"/>
           </a:xfrm>
           <a:prstGeom prst="rect">
             <a:avLst/>
@@ -11292,7 +11410,7 @@
                 </a:solidFill>
                 <a:latin typeface="Calibri"/>
               </a:rPr>
-              <a:t>The city head, who signs the page on Friday, and the three roles in the room who each lose something under it: a page that cannot answer them is dropped, and the city keeps paying for hours.</a:t>
+              <a:t>The city head, who signs the page on Friday, and the three roles in the room who each lose something under it: driver operations loses the hours it reported as supply, marketing the promise it sold, and finance a saving it cannot book until a test reports. A page that cannot answer them is dropped, and the city keeps paying for hours.</a:t>
             </a:r>
           </a:p>
         </p:txBody>
@@ -11305,7 +11423,7 @@
         </p:nvSpPr>
         <p:spPr>
           <a:xfrm>
-            <a:off x="1853145" y="4201668"/>
+            <a:off x="1853145" y="4631689"/>
             <a:ext cx="8485403" cy="18288"/>
           </a:xfrm>
           <a:prstGeom prst="rect">
@@ -11349,7 +11467,7 @@
         </p:nvSpPr>
         <p:spPr>
           <a:xfrm>
-            <a:off x="530352" y="3634740"/>
+            <a:off x="530352" y="4064761"/>
             <a:ext cx="2645587" cy="168656"/>
           </a:xfrm>
           <a:prstGeom prst="rect">
@@ -11384,7 +11502,7 @@
         </p:nvSpPr>
         <p:spPr>
           <a:xfrm>
-            <a:off x="1752561" y="4110228"/>
+            <a:off x="1752561" y="4540249"/>
             <a:ext cx="201168" cy="201168"/>
           </a:xfrm>
           <a:prstGeom prst="ellipse">
@@ -11428,7 +11546,7 @@
         </p:nvSpPr>
         <p:spPr>
           <a:xfrm>
-            <a:off x="530352" y="4521708"/>
+            <a:off x="530352" y="4951729"/>
             <a:ext cx="2645587" cy="1076960"/>
           </a:xfrm>
           <a:prstGeom prst="roundRect">
@@ -11482,7 +11600,7 @@
         </p:nvSpPr>
         <p:spPr>
           <a:xfrm>
-            <a:off x="694944" y="4668012"/>
+            <a:off x="694944" y="5098033"/>
             <a:ext cx="2316403" cy="251205"/>
           </a:xfrm>
           <a:prstGeom prst="rect">
@@ -11517,7 +11635,7 @@
         </p:nvSpPr>
         <p:spPr>
           <a:xfrm>
-            <a:off x="694944" y="4955794"/>
+            <a:off x="694944" y="5385816"/>
             <a:ext cx="2316403" cy="201676"/>
           </a:xfrm>
           <a:prstGeom prst="rect">
@@ -11552,7 +11670,7 @@
         </p:nvSpPr>
         <p:spPr>
           <a:xfrm>
-            <a:off x="3358819" y="3634740"/>
+            <a:off x="3358819" y="4064761"/>
             <a:ext cx="2645587" cy="168656"/>
           </a:xfrm>
           <a:prstGeom prst="rect">
@@ -11587,7 +11705,7 @@
         </p:nvSpPr>
         <p:spPr>
           <a:xfrm>
-            <a:off x="4581029" y="4110228"/>
+            <a:off x="4581029" y="4540249"/>
             <a:ext cx="201168" cy="201168"/>
           </a:xfrm>
           <a:prstGeom prst="ellipse">
@@ -11631,7 +11749,7 @@
         </p:nvSpPr>
         <p:spPr>
           <a:xfrm>
-            <a:off x="3358819" y="4521708"/>
+            <a:off x="3358819" y="4951729"/>
             <a:ext cx="2645587" cy="1076960"/>
           </a:xfrm>
           <a:prstGeom prst="roundRect">
@@ -11685,7 +11803,7 @@
         </p:nvSpPr>
         <p:spPr>
           <a:xfrm>
-            <a:off x="3523411" y="4668012"/>
+            <a:off x="3523411" y="5098033"/>
             <a:ext cx="2316403" cy="251205"/>
           </a:xfrm>
           <a:prstGeom prst="rect">
@@ -11720,7 +11838,7 @@
         </p:nvSpPr>
         <p:spPr>
           <a:xfrm>
-            <a:off x="3523411" y="4955794"/>
+            <a:off x="3523411" y="5385816"/>
             <a:ext cx="2316403" cy="366776"/>
           </a:xfrm>
           <a:prstGeom prst="rect">
@@ -11755,7 +11873,7 @@
         </p:nvSpPr>
         <p:spPr>
           <a:xfrm>
-            <a:off x="6187287" y="3634740"/>
+            <a:off x="6187287" y="4064761"/>
             <a:ext cx="2645587" cy="168656"/>
           </a:xfrm>
           <a:prstGeom prst="rect">
@@ -11790,7 +11908,7 @@
         </p:nvSpPr>
         <p:spPr>
           <a:xfrm>
-            <a:off x="7409497" y="4110228"/>
+            <a:off x="7409497" y="4540249"/>
             <a:ext cx="201168" cy="201168"/>
           </a:xfrm>
           <a:prstGeom prst="ellipse">
@@ -11834,7 +11952,7 @@
         </p:nvSpPr>
         <p:spPr>
           <a:xfrm>
-            <a:off x="6187287" y="4521708"/>
+            <a:off x="6187287" y="4951729"/>
             <a:ext cx="2645587" cy="1076960"/>
           </a:xfrm>
           <a:prstGeom prst="roundRect">
@@ -11888,7 +12006,7 @@
         </p:nvSpPr>
         <p:spPr>
           <a:xfrm>
-            <a:off x="6351879" y="4668012"/>
+            <a:off x="6351879" y="5098033"/>
             <a:ext cx="2316403" cy="251205"/>
           </a:xfrm>
           <a:prstGeom prst="rect">
@@ -11923,7 +12041,7 @@
         </p:nvSpPr>
         <p:spPr>
           <a:xfrm>
-            <a:off x="6351879" y="4955794"/>
+            <a:off x="6351879" y="5385816"/>
             <a:ext cx="2316403" cy="201676"/>
           </a:xfrm>
           <a:prstGeom prst="rect">
@@ -11958,7 +12076,7 @@
         </p:nvSpPr>
         <p:spPr>
           <a:xfrm>
-            <a:off x="9015755" y="3634740"/>
+            <a:off x="9015755" y="4064761"/>
             <a:ext cx="2645587" cy="168656"/>
           </a:xfrm>
           <a:prstGeom prst="rect">
@@ -11993,7 +12111,7 @@
         </p:nvSpPr>
         <p:spPr>
           <a:xfrm>
-            <a:off x="10237965" y="4110228"/>
+            <a:off x="10237965" y="4540249"/>
             <a:ext cx="201168" cy="201168"/>
           </a:xfrm>
           <a:prstGeom prst="ellipse">
@@ -12037,7 +12155,7 @@
         </p:nvSpPr>
         <p:spPr>
           <a:xfrm>
-            <a:off x="9015755" y="4521708"/>
+            <a:off x="9015755" y="4951729"/>
             <a:ext cx="2645587" cy="1076960"/>
           </a:xfrm>
           <a:prstGeom prst="roundRect">
@@ -12097,7 +12215,7 @@
         </p:nvSpPr>
         <p:spPr>
           <a:xfrm>
-            <a:off x="9180347" y="4668012"/>
+            <a:off x="9180347" y="5098033"/>
             <a:ext cx="2316403" cy="251205"/>
           </a:xfrm>
           <a:prstGeom prst="rect">
@@ -12132,7 +12250,7 @@
         </p:nvSpPr>
         <p:spPr>
           <a:xfrm>
-            <a:off x="9180347" y="4955794"/>
+            <a:off x="9180347" y="5385816"/>
             <a:ext cx="2316403" cy="201676"/>
           </a:xfrm>
           <a:prstGeom prst="rect">
@@ -12595,7 +12713,7 @@
       </p:sp>
       <p:pic>
         <p:nvPicPr>
-          <p:cNvPr id="9" name="mermaid diagram" descr="6b958eed6d4003e3.png"/>
+          <p:cNvPr id="9" name="mermaid diagram" descr="5efef7411ee1a7bf.png"/>
           <p:cNvPicPr>
             <a:picLocks noChangeAspect="1"/>
           </p:cNvPicPr>
@@ -15054,7 +15172,7 @@
                 </a:solidFill>
                 <a:latin typeface="Calibri"/>
               </a:rPr>
-              <a:t>If drivers who serve riders log off, riders wait longer, and the wait, read zone by zone, is the line that moves for riders; the shrinking count of drivers shows who left, while the north star would rise. The floor sits in the gap: no idle-tail week accepted more than 0.46 of its offers and no other week fewer than 0.78; counting an accepted trip later cancelled as declined moves the edges to 0.43 and 0.67, and half still sits between.</a:t>
+              <a:t>If drivers who serve riders log off, riders wait longer, and the wait, read zone by zone, is the line that moves for riders; the shrinking count of drivers shows who left, while the north star would rise. The acceptance floor sits in the gap: no idle-tail week accepted more than 0.46 of its offers and no other week fewer than 0.78; counting an accepted trip later cancelled as declined moves the edges to 0.43 and 0.67, and half still sits between.</a:t>
             </a:r>
           </a:p>
         </p:txBody>
@@ -15949,7 +16067,7 @@
         <p:spPr>
           <a:xfrm>
             <a:off x="530352" y="3419856"/>
-            <a:ext cx="11130991" cy="1874519"/>
+            <a:ext cx="11130991" cy="2141220"/>
           </a:xfrm>
           <a:prstGeom prst="roundRect">
             <a:avLst>
@@ -15997,7 +16115,7 @@
         <p:spPr>
           <a:xfrm>
             <a:off x="676656" y="3547872"/>
-            <a:ext cx="45720" cy="1618487"/>
+            <a:ext cx="45720" cy="1885187"/>
           </a:xfrm>
           <a:prstGeom prst="roundRect">
             <a:avLst>
@@ -16043,7 +16161,7 @@
         <p:spPr>
           <a:xfrm>
             <a:off x="877824" y="3538728"/>
-            <a:ext cx="10564063" cy="1691639"/>
+            <a:ext cx="10564063" cy="1958340"/>
           </a:xfrm>
           <a:prstGeom prst="rect">
             <a:avLst/>
@@ -16072,7 +16190,7 @@
                 </a:solidFill>
                 <a:latin typeface="Calibri"/>
               </a:rPr>
-              <a:t>The Rs 300 floor stays, and a driver-week earns its top-up only if the driver accepted at least half the offers shown, an accepted trip later cancelled counting as declined. </a:t>
+              <a:t>The Rs 300 floor stays, and a driver-week earns its top-up only if the driver accepted at least half the offers shown, an accepted trip later cancelled counting as declined. Every driver-week under half belongs to the idle tail (S89), so the Rs 1.159 crore is the idle tail's top-up. </a:t>
             </a:r>
             <a:r>
               <a:rPr sz="1500" b="1" i="0">

--- a/content/W04/D1/slides/C2_W04_D01_half2_STUDENT.pptx
+++ b/content/W04/D1/slides/C2_W04_D01_half2_STUDENT.pptx
@@ -1167,7 +1167,7 @@
           </a:p>
           <a:p>
             <a:r>
-              <a:t>Transition: the faculty block.</a:t>
+              <a:t>Transition: the tentative faculty block, or the metric clinic in its place.</a:t>
             </a:r>
           </a:p>
         </p:txBody>

--- a/content/W04/D1/slides/C2_W04_D01_half2_STUDENT.pptx
+++ b/content/W04/D1/slides/C2_W04_D01_half2_STUDENT.pptx
@@ -6496,8 +6496,8 @@
           <p:nvPr/>
         </p:nvGraphicFramePr>
         <p:xfrm>
-          <a:off x="530352" y="1956816"/>
-          <a:ext cx="11130989" cy="3911600"/>
+          <a:off x="530352" y="1864360"/>
+          <a:ext cx="11130989" cy="4153408"/>
         </p:xfrm>
         <a:graphic>
           <a:graphicData uri="http://schemas.openxmlformats.org/drawingml/2006/table">
@@ -6782,7 +6782,7 @@
                   </a:tcPr>
                 </a:tc>
               </a:tr>
-              <a:tr h="853440">
+              <a:tr h="1095248">
                 <a:tc>
                   <a:txBody>
                     <a:bodyPr/>
@@ -6839,7 +6839,7 @@
                           </a:solidFill>
                           <a:latin typeface="Calibri"/>
                         </a:rPr>
-                        <a:t>180 drivers added hours on fewer trips, mostly in the outer zones, where waits fell 6.6 to 5.95 minutes at about Rs 46,000 per extra trip</a:t>
+                        <a:t>180 drivers added hours on fewer trips, mostly in the outer zones, where waits fell 6.6 to 5.95 minutes: Rs 85.7 lakh of top-up for about 185 extra trips, about Rs 46,000 each</a:t>
                       </a:r>
                     </a:p>
                   </a:txBody>
@@ -10509,7 +10509,7 @@
                           </a:solidFill>
                           <a:latin typeface="Calibri"/>
                         </a:rPr>
-                        <a:t>Pay for trips riders asked for</a:t>
+                        <a:t>Count only trips riders asked for</a:t>
                       </a:r>
                     </a:p>
                   </a:txBody>

--- a/content/W04/D1/slides/C2_W04_D01_half2_STUDENT.pptx
+++ b/content/W04/D1/slides/C2_W04_D01_half2_STUDENT.pptx
@@ -1327,12 +1327,12 @@
           </a:p>
           <a:p>
             <a:r>
-              <a:t>When it stalls: a group with a guardrail that is another growth count ("bookings per driver") is</a:t>
-            </a:r>
-          </a:p>
-          <a:p>
-            <a:r>
-              <a:t>asked what that guardrail would catch.</a:t>
+              <a:t>When it stalls: a group that offers a growth target as a guardrail ("bookings per driver up 20</a:t>
+            </a:r>
+          </a:p>
+          <a:p>
+            <a:r>
+              <a:t>percent") is asked what that guardrail would catch.</a:t>
             </a:r>
           </a:p>
           <a:p>
